--- a/public/lessons/year-6-maths/spring/week-11/simplify-fractions/teaching-powerpoint-v1.pptx
+++ b/public/lessons/year-6-maths/spring/week-11/simplify-fractions/teaching-powerpoint-v1.pptx
@@ -2,24 +2,24 @@
 <file path=ppt/presentation.xml><?xml version="1.0" encoding="utf-8"?>
 <p:presentation xmlns:p="http://schemas.openxmlformats.org/presentationml/2006/main">
   <p:sldMasterIdLst>
-    <p:sldMasterId xmlns:r="http://schemas.openxmlformats.org/officeDocument/2006/relationships" id="2147483648" r:id="Rdb0b6d440bcc4b79"/>
+    <p:sldMasterId xmlns:r="http://schemas.openxmlformats.org/officeDocument/2006/relationships" id="2147483648" r:id="R50ddaac5c3b84b60"/>
   </p:sldMasterIdLst>
   <p:notesMasterIdLst>
-    <p:notesMasterId xmlns:r="http://schemas.openxmlformats.org/officeDocument/2006/relationships" r:id="Rc381f4084b684744"/>
+    <p:notesMasterId xmlns:r="http://schemas.openxmlformats.org/officeDocument/2006/relationships" r:id="R741b2371e40a419c"/>
   </p:notesMasterIdLst>
   <p:sldIdLst>
-    <p:sldId xmlns:r="http://schemas.openxmlformats.org/officeDocument/2006/relationships" id="256" r:id="R8a149c04a7e14ba4"/>
-    <p:sldId xmlns:r="http://schemas.openxmlformats.org/officeDocument/2006/relationships" id="257" r:id="R89b8b89445c94095"/>
-    <p:sldId xmlns:r="http://schemas.openxmlformats.org/officeDocument/2006/relationships" id="258" r:id="R44c8235e36b04778"/>
-    <p:sldId xmlns:r="http://schemas.openxmlformats.org/officeDocument/2006/relationships" id="259" r:id="R04d0af8bf22a4dfe"/>
-    <p:sldId xmlns:r="http://schemas.openxmlformats.org/officeDocument/2006/relationships" id="260" r:id="Ra9cb922cf184463f"/>
-    <p:sldId xmlns:r="http://schemas.openxmlformats.org/officeDocument/2006/relationships" id="261" r:id="R917eeb04efe044e3"/>
-    <p:sldId xmlns:r="http://schemas.openxmlformats.org/officeDocument/2006/relationships" id="262" r:id="Rbd71f3aa1e454e15"/>
-    <p:sldId xmlns:r="http://schemas.openxmlformats.org/officeDocument/2006/relationships" id="263" r:id="R5bf3625671174f42"/>
-    <p:sldId xmlns:r="http://schemas.openxmlformats.org/officeDocument/2006/relationships" id="264" r:id="R4238ff5aca074505"/>
-    <p:sldId xmlns:r="http://schemas.openxmlformats.org/officeDocument/2006/relationships" id="265" r:id="R4cec5942fd724c5a"/>
-    <p:sldId xmlns:r="http://schemas.openxmlformats.org/officeDocument/2006/relationships" id="266" r:id="R69fe0fccba9b4974"/>
-    <p:sldId xmlns:r="http://schemas.openxmlformats.org/officeDocument/2006/relationships" id="267" r:id="R61b2bdc291564676"/>
+    <p:sldId xmlns:r="http://schemas.openxmlformats.org/officeDocument/2006/relationships" id="256" r:id="Rd3dc9bf22b354d87"/>
+    <p:sldId xmlns:r="http://schemas.openxmlformats.org/officeDocument/2006/relationships" id="257" r:id="R111be950211d4678"/>
+    <p:sldId xmlns:r="http://schemas.openxmlformats.org/officeDocument/2006/relationships" id="258" r:id="Ra5788bb413f44c7f"/>
+    <p:sldId xmlns:r="http://schemas.openxmlformats.org/officeDocument/2006/relationships" id="259" r:id="R888c2a943f8c4e1c"/>
+    <p:sldId xmlns:r="http://schemas.openxmlformats.org/officeDocument/2006/relationships" id="260" r:id="R3a9ef3e6e60849ee"/>
+    <p:sldId xmlns:r="http://schemas.openxmlformats.org/officeDocument/2006/relationships" id="261" r:id="Ra4e1e0713bc5462d"/>
+    <p:sldId xmlns:r="http://schemas.openxmlformats.org/officeDocument/2006/relationships" id="262" r:id="R8781d725a29045cc"/>
+    <p:sldId xmlns:r="http://schemas.openxmlformats.org/officeDocument/2006/relationships" id="263" r:id="R020344ae37c74013"/>
+    <p:sldId xmlns:r="http://schemas.openxmlformats.org/officeDocument/2006/relationships" id="264" r:id="Rf405a7b191cf47c5"/>
+    <p:sldId xmlns:r="http://schemas.openxmlformats.org/officeDocument/2006/relationships" id="265" r:id="Rfe866729a2b74bea"/>
+    <p:sldId xmlns:r="http://schemas.openxmlformats.org/officeDocument/2006/relationships" id="266" r:id="R5927e838bd02469a"/>
+    <p:sldId xmlns:r="http://schemas.openxmlformats.org/officeDocument/2006/relationships" id="267" r:id="Ra91d10092b4a48f2"/>
   </p:sldIdLst>
   <p:sldSz cx="12192000" cy="6858000"/>
   <p:notesSz cx="6858000" cy="9144000"/>
@@ -873,7 +873,7 @@
           <a:lstStyle xmlns:a="http://schemas.openxmlformats.org/drawingml/2006/main"/>
           <a:p xmlns:a="http://schemas.openxmlformats.org/drawingml/2006/main">
             <a:r>
-              <a:t>I do. Reveal the question, setup and each calculation stage one click at a time. Pupils watch before copying. Model answer: 3/4.</a:t>
+              <a:t>I do. Reveal the question, then reveal each mathematical change one click at a time. Point to the numbers and operation that changed before moving to the next line. Final answer: 3/4.</a:t>
             </a:r>
           </a:p>
         </p:txBody>
@@ -1291,7 +1291,7 @@
   </p:cSld>
   <p:clrMap bg1="lt1" tx1="dk1" bg2="lt2" tx2="dk2" accent1="accent1" accent2="accent2" accent3="accent3" accent4="accent4" accent5="accent5" accent6="accent6" hlink="hlink" folHlink="folHlink"/>
   <p:sldLayoutIdLst>
-    <p:sldLayoutId xmlns:r="http://schemas.openxmlformats.org/officeDocument/2006/relationships" id="2147483649" r:id="R3810e70c010c4fe0"/>
+    <p:sldLayoutId xmlns:r="http://schemas.openxmlformats.org/officeDocument/2006/relationships" id="2147483649" r:id="R36366c9840dc418d"/>
   </p:sldLayoutIdLst>
   <p:txStyles>
     <p:titleStyle>
@@ -1842,7 +1842,7 @@
           <p:cNvPr id="12" name="">
             <a:extLst xmlns:a="http://schemas.openxmlformats.org/drawingml/2006/main">
               <a:ext uri="{FF2B5EF4-FFF2-40B4-BE49-F238E27FC236}">
-                <a16:creationId xmlns:a16="http://schemas.microsoft.com/office/drawing/2014/main" id="{285D00F3-10DB-4E42-8DDE-494825B9784A}"/>
+                <a16:creationId xmlns:a16="http://schemas.microsoft.com/office/drawing/2014/main" id="{48CAD107-8476-4011-944C-8C08A5A7B59B}"/>
               </a:ext>
             </a:extLst>
           </p:cNvPr>
@@ -1874,7 +1874,7 @@
           <p:cNvPr id="2" name="">
             <a:extLst xmlns:a="http://schemas.openxmlformats.org/drawingml/2006/main">
               <a:ext uri="{FF2B5EF4-FFF2-40B4-BE49-F238E27FC236}">
-                <a16:creationId xmlns:a16="http://schemas.microsoft.com/office/drawing/2014/main" id="{ECE1B1D8-7CF5-4F4F-8287-A0A3238291D4}"/>
+                <a16:creationId xmlns:a16="http://schemas.microsoft.com/office/drawing/2014/main" id="{B6E93059-88D3-44C1-95C5-2A48A9AC2A5E}"/>
               </a:ext>
             </a:extLst>
           </p:cNvPr>
@@ -1931,7 +1931,7 @@
           <p:cNvPr id="3" name="">
             <a:extLst xmlns:a="http://schemas.openxmlformats.org/drawingml/2006/main">
               <a:ext uri="{FF2B5EF4-FFF2-40B4-BE49-F238E27FC236}">
-                <a16:creationId xmlns:a16="http://schemas.microsoft.com/office/drawing/2014/main" id="{6E4D4383-B3B5-4632-B035-CA1AB611D2A9}"/>
+                <a16:creationId xmlns:a16="http://schemas.microsoft.com/office/drawing/2014/main" id="{18AB14F4-7F48-4984-B777-0C7D30352519}"/>
               </a:ext>
             </a:extLst>
           </p:cNvPr>
@@ -1965,7 +1965,7 @@
           <p:cNvPr id="4" name="">
             <a:extLst xmlns:a="http://schemas.openxmlformats.org/drawingml/2006/main">
               <a:ext uri="{FF2B5EF4-FFF2-40B4-BE49-F238E27FC236}">
-                <a16:creationId xmlns:a16="http://schemas.microsoft.com/office/drawing/2014/main" id="{A412C095-F961-48B7-BFE8-448476D5B314}"/>
+                <a16:creationId xmlns:a16="http://schemas.microsoft.com/office/drawing/2014/main" id="{AA3811B3-5D43-41BE-B9E8-24FBFC4C1A75}"/>
               </a:ext>
             </a:extLst>
           </p:cNvPr>
@@ -2022,7 +2022,7 @@
           <p:cNvPr id="5" name="">
             <a:extLst xmlns:a="http://schemas.openxmlformats.org/drawingml/2006/main">
               <a:ext uri="{FF2B5EF4-FFF2-40B4-BE49-F238E27FC236}">
-                <a16:creationId xmlns:a16="http://schemas.microsoft.com/office/drawing/2014/main" id="{F07E3826-D5E2-4D26-B7B1-161E42F85791}"/>
+                <a16:creationId xmlns:a16="http://schemas.microsoft.com/office/drawing/2014/main" id="{38158F4D-FC48-42E3-97A8-8BC3F43F4874}"/>
               </a:ext>
             </a:extLst>
           </p:cNvPr>
@@ -2079,7 +2079,7 @@
           <p:cNvPr id="6" name="">
             <a:extLst xmlns:a="http://schemas.openxmlformats.org/drawingml/2006/main">
               <a:ext uri="{FF2B5EF4-FFF2-40B4-BE49-F238E27FC236}">
-                <a16:creationId xmlns:a16="http://schemas.microsoft.com/office/drawing/2014/main" id="{D7110D4E-2E52-4CA9-A93B-BBE99CBBAA2B}"/>
+                <a16:creationId xmlns:a16="http://schemas.microsoft.com/office/drawing/2014/main" id="{9391B5C2-316D-4F73-9D26-A3134E05838C}"/>
               </a:ext>
             </a:extLst>
           </p:cNvPr>
@@ -2113,7 +2113,7 @@
           <p:cNvPr id="7" name="">
             <a:extLst xmlns:a="http://schemas.openxmlformats.org/drawingml/2006/main">
               <a:ext uri="{FF2B5EF4-FFF2-40B4-BE49-F238E27FC236}">
-                <a16:creationId xmlns:a16="http://schemas.microsoft.com/office/drawing/2014/main" id="{B7C74002-3680-42F9-8826-8D8BDF41E5A1}"/>
+                <a16:creationId xmlns:a16="http://schemas.microsoft.com/office/drawing/2014/main" id="{17E05BA1-9535-4935-BB4C-C2E6468AB2D5}"/>
               </a:ext>
             </a:extLst>
           </p:cNvPr>
@@ -2170,7 +2170,7 @@
           <p:cNvPr id="8" name="">
             <a:extLst xmlns:a="http://schemas.openxmlformats.org/drawingml/2006/main">
               <a:ext uri="{FF2B5EF4-FFF2-40B4-BE49-F238E27FC236}">
-                <a16:creationId xmlns:a16="http://schemas.microsoft.com/office/drawing/2014/main" id="{BD4B529A-EB5F-4734-BEAB-B5825637D451}"/>
+                <a16:creationId xmlns:a16="http://schemas.microsoft.com/office/drawing/2014/main" id="{DEC263C1-5725-4C5F-8A2C-A17633ABE65C}"/>
               </a:ext>
             </a:extLst>
           </p:cNvPr>
@@ -2227,7 +2227,7 @@
           <p:cNvPr id="9" name="">
             <a:extLst xmlns:a="http://schemas.openxmlformats.org/drawingml/2006/main">
               <a:ext uri="{FF2B5EF4-FFF2-40B4-BE49-F238E27FC236}">
-                <a16:creationId xmlns:a16="http://schemas.microsoft.com/office/drawing/2014/main" id="{15879230-C2D6-4440-A6BA-A641136A580B}"/>
+                <a16:creationId xmlns:a16="http://schemas.microsoft.com/office/drawing/2014/main" id="{F9113E53-4247-4D6B-9185-408AE456C9F2}"/>
               </a:ext>
             </a:extLst>
           </p:cNvPr>
@@ -2284,7 +2284,7 @@
           <p:cNvPr id="10" name="">
             <a:extLst xmlns:a="http://schemas.openxmlformats.org/drawingml/2006/main">
               <a:ext uri="{FF2B5EF4-FFF2-40B4-BE49-F238E27FC236}">
-                <a16:creationId xmlns:a16="http://schemas.microsoft.com/office/drawing/2014/main" id="{B417C68F-EAEA-4DB5-82AC-E819C2932AB4}"/>
+                <a16:creationId xmlns:a16="http://schemas.microsoft.com/office/drawing/2014/main" id="{E6AF4A7F-AFDB-4EF9-A7BB-64F8C79CDC35}"/>
               </a:ext>
             </a:extLst>
           </p:cNvPr>
@@ -2341,7 +2341,7 @@
           <p:cNvPr id="11" name="">
             <a:extLst xmlns:a="http://schemas.openxmlformats.org/drawingml/2006/main">
               <a:ext uri="{FF2B5EF4-FFF2-40B4-BE49-F238E27FC236}">
-                <a16:creationId xmlns:a16="http://schemas.microsoft.com/office/drawing/2014/main" id="{740F8E15-A698-4745-814F-167189EF0531}"/>
+                <a16:creationId xmlns:a16="http://schemas.microsoft.com/office/drawing/2014/main" id="{750AA704-9375-422F-A8DA-0B4BC97BC40C}"/>
               </a:ext>
             </a:extLst>
           </p:cNvPr>
@@ -2396,7 +2396,7 @@
     </p:spTree>
     <p:extLst>
       <p:ext uri="{BB962C8B-B14F-4D97-AF65-F5344CB8AC3E}">
-        <p14:creationId xmlns:p14="http://schemas.microsoft.com/office/powerpoint/2010/main" val="356091221"/>
+        <p14:creationId xmlns:p14="http://schemas.microsoft.com/office/powerpoint/2010/main" val="546660087"/>
       </p:ext>
     </p:extLst>
   </p:cSld>
@@ -2427,7 +2427,7 @@
           <p:cNvPr id="14" name="">
             <a:extLst xmlns:a="http://schemas.openxmlformats.org/drawingml/2006/main">
               <a:ext uri="{FF2B5EF4-FFF2-40B4-BE49-F238E27FC236}">
-                <a16:creationId xmlns:a16="http://schemas.microsoft.com/office/drawing/2014/main" id="{434DAD36-9020-49C3-ACB4-509B63F917A1}"/>
+                <a16:creationId xmlns:a16="http://schemas.microsoft.com/office/drawing/2014/main" id="{6DA00A30-9E47-4273-8A21-0B280F258376}"/>
               </a:ext>
             </a:extLst>
           </p:cNvPr>
@@ -2459,7 +2459,7 @@
           <p:cNvPr id="2" name="">
             <a:extLst xmlns:a="http://schemas.openxmlformats.org/drawingml/2006/main">
               <a:ext uri="{FF2B5EF4-FFF2-40B4-BE49-F238E27FC236}">
-                <a16:creationId xmlns:a16="http://schemas.microsoft.com/office/drawing/2014/main" id="{8B133D51-CDDF-4BFD-9E25-02B7FBECBE74}"/>
+                <a16:creationId xmlns:a16="http://schemas.microsoft.com/office/drawing/2014/main" id="{C90A4F65-2386-49F7-928C-6E782D3D44B4}"/>
               </a:ext>
             </a:extLst>
           </p:cNvPr>
@@ -2516,7 +2516,7 @@
           <p:cNvPr id="3" name="">
             <a:extLst xmlns:a="http://schemas.openxmlformats.org/drawingml/2006/main">
               <a:ext uri="{FF2B5EF4-FFF2-40B4-BE49-F238E27FC236}">
-                <a16:creationId xmlns:a16="http://schemas.microsoft.com/office/drawing/2014/main" id="{CEDE78F0-E07B-4297-8A78-F8A965F8670D}"/>
+                <a16:creationId xmlns:a16="http://schemas.microsoft.com/office/drawing/2014/main" id="{992E357E-7D92-4870-9F58-DF8B9E4FCF2F}"/>
               </a:ext>
             </a:extLst>
           </p:cNvPr>
@@ -2548,7 +2548,7 @@
           <p:cNvPr id="4" name="">
             <a:extLst xmlns:a="http://schemas.openxmlformats.org/drawingml/2006/main">
               <a:ext uri="{FF2B5EF4-FFF2-40B4-BE49-F238E27FC236}">
-                <a16:creationId xmlns:a16="http://schemas.microsoft.com/office/drawing/2014/main" id="{5DF43489-24AA-45C7-9885-E1E1E56FB6BD}"/>
+                <a16:creationId xmlns:a16="http://schemas.microsoft.com/office/drawing/2014/main" id="{0C230A4D-C630-4178-90F1-84937EAD0A40}"/>
               </a:ext>
             </a:extLst>
           </p:cNvPr>
@@ -2605,7 +2605,7 @@
           <p:cNvPr id="5" name="">
             <a:extLst xmlns:a="http://schemas.openxmlformats.org/drawingml/2006/main">
               <a:ext uri="{FF2B5EF4-FFF2-40B4-BE49-F238E27FC236}">
-                <a16:creationId xmlns:a16="http://schemas.microsoft.com/office/drawing/2014/main" id="{1ACADD54-D6EF-4E0E-B0F6-9E7F5D0F5070}"/>
+                <a16:creationId xmlns:a16="http://schemas.microsoft.com/office/drawing/2014/main" id="{1CA060B1-2968-477C-B924-22ABAD5E29B8}"/>
               </a:ext>
             </a:extLst>
           </p:cNvPr>
@@ -2662,7 +2662,7 @@
           <p:cNvPr id="6" name="">
             <a:extLst xmlns:a="http://schemas.openxmlformats.org/drawingml/2006/main">
               <a:ext uri="{FF2B5EF4-FFF2-40B4-BE49-F238E27FC236}">
-                <a16:creationId xmlns:a16="http://schemas.microsoft.com/office/drawing/2014/main" id="{B05ADAE9-8DB4-45E5-9822-EA068DD284F5}"/>
+                <a16:creationId xmlns:a16="http://schemas.microsoft.com/office/drawing/2014/main" id="{8668E302-770F-4607-AA38-1BBFF0D6964C}"/>
               </a:ext>
             </a:extLst>
           </p:cNvPr>
@@ -2719,7 +2719,7 @@
           <p:cNvPr id="7" name="">
             <a:extLst xmlns:a="http://schemas.openxmlformats.org/drawingml/2006/main">
               <a:ext uri="{FF2B5EF4-FFF2-40B4-BE49-F238E27FC236}">
-                <a16:creationId xmlns:a16="http://schemas.microsoft.com/office/drawing/2014/main" id="{ED50F1B1-F432-4280-BBAA-5639423ECA5E}"/>
+                <a16:creationId xmlns:a16="http://schemas.microsoft.com/office/drawing/2014/main" id="{964BB9AC-70C3-4FC9-ACD0-2D7AE83162D2}"/>
               </a:ext>
             </a:extLst>
           </p:cNvPr>
@@ -2751,7 +2751,7 @@
           <p:cNvPr id="8" name="">
             <a:extLst xmlns:a="http://schemas.openxmlformats.org/drawingml/2006/main">
               <a:ext uri="{FF2B5EF4-FFF2-40B4-BE49-F238E27FC236}">
-                <a16:creationId xmlns:a16="http://schemas.microsoft.com/office/drawing/2014/main" id="{3305CC58-95BA-410D-9F11-9227516ED506}"/>
+                <a16:creationId xmlns:a16="http://schemas.microsoft.com/office/drawing/2014/main" id="{13758C87-883A-4C12-8DD3-64AAE1AEBA83}"/>
               </a:ext>
             </a:extLst>
           </p:cNvPr>
@@ -2808,7 +2808,7 @@
           <p:cNvPr id="9" name="">
             <a:extLst xmlns:a="http://schemas.openxmlformats.org/drawingml/2006/main">
               <a:ext uri="{FF2B5EF4-FFF2-40B4-BE49-F238E27FC236}">
-                <a16:creationId xmlns:a16="http://schemas.microsoft.com/office/drawing/2014/main" id="{84C0EC74-50DF-4655-B2F2-3EA17303B437}"/>
+                <a16:creationId xmlns:a16="http://schemas.microsoft.com/office/drawing/2014/main" id="{FA6532B9-E121-4118-A5F5-B153F371A016}"/>
               </a:ext>
             </a:extLst>
           </p:cNvPr>
@@ -2865,7 +2865,7 @@
           <p:cNvPr id="10" name="">
             <a:extLst xmlns:a="http://schemas.openxmlformats.org/drawingml/2006/main">
               <a:ext uri="{FF2B5EF4-FFF2-40B4-BE49-F238E27FC236}">
-                <a16:creationId xmlns:a16="http://schemas.microsoft.com/office/drawing/2014/main" id="{82EEAFCB-B82D-45AA-B65A-44B2BC498400}"/>
+                <a16:creationId xmlns:a16="http://schemas.microsoft.com/office/drawing/2014/main" id="{1ADD892D-C648-483F-9376-598A034131E9}"/>
               </a:ext>
             </a:extLst>
           </p:cNvPr>
@@ -2922,7 +2922,7 @@
           <p:cNvPr id="11" name="">
             <a:extLst xmlns:a="http://schemas.openxmlformats.org/drawingml/2006/main">
               <a:ext uri="{FF2B5EF4-FFF2-40B4-BE49-F238E27FC236}">
-                <a16:creationId xmlns:a16="http://schemas.microsoft.com/office/drawing/2014/main" id="{C26353E7-A82B-4E6C-8971-C5C5CF4ADB17}"/>
+                <a16:creationId xmlns:a16="http://schemas.microsoft.com/office/drawing/2014/main" id="{592EC52D-BD87-4FF4-AEF1-4D7EF942802C}"/>
               </a:ext>
             </a:extLst>
           </p:cNvPr>
@@ -2979,7 +2979,7 @@
           <p:cNvPr id="12" name="">
             <a:extLst xmlns:a="http://schemas.openxmlformats.org/drawingml/2006/main">
               <a:ext uri="{FF2B5EF4-FFF2-40B4-BE49-F238E27FC236}">
-                <a16:creationId xmlns:a16="http://schemas.microsoft.com/office/drawing/2014/main" id="{4D08B772-5058-4F72-B781-AA6709C8C13C}"/>
+                <a16:creationId xmlns:a16="http://schemas.microsoft.com/office/drawing/2014/main" id="{3D1D5572-2D2C-416F-A4AA-CA032138CBB0}"/>
               </a:ext>
             </a:extLst>
           </p:cNvPr>
@@ -3036,7 +3036,7 @@
           <p:cNvPr id="13" name="">
             <a:extLst xmlns:a="http://schemas.openxmlformats.org/drawingml/2006/main">
               <a:ext uri="{FF2B5EF4-FFF2-40B4-BE49-F238E27FC236}">
-                <a16:creationId xmlns:a16="http://schemas.microsoft.com/office/drawing/2014/main" id="{5B127F8B-BC89-40D2-99AE-BE2ADA5079DC}"/>
+                <a16:creationId xmlns:a16="http://schemas.microsoft.com/office/drawing/2014/main" id="{EDB7ADB9-F4E9-440C-A37B-46C3968CE805}"/>
               </a:ext>
             </a:extLst>
           </p:cNvPr>
@@ -3091,7 +3091,7 @@
     </p:spTree>
     <p:extLst>
       <p:ext uri="{BB962C8B-B14F-4D97-AF65-F5344CB8AC3E}">
-        <p14:creationId xmlns:p14="http://schemas.microsoft.com/office/powerpoint/2010/main" val="396733647"/>
+        <p14:creationId xmlns:p14="http://schemas.microsoft.com/office/powerpoint/2010/main" val="1912046701"/>
       </p:ext>
     </p:extLst>
   </p:cSld>
@@ -3292,7 +3292,7 @@
           <p:cNvPr id="19" name="">
             <a:extLst xmlns:a="http://schemas.openxmlformats.org/drawingml/2006/main">
               <a:ext uri="{FF2B5EF4-FFF2-40B4-BE49-F238E27FC236}">
-                <a16:creationId xmlns:a16="http://schemas.microsoft.com/office/drawing/2014/main" id="{54B6A2F3-26CA-491C-BC92-B17E031842FD}"/>
+                <a16:creationId xmlns:a16="http://schemas.microsoft.com/office/drawing/2014/main" id="{52B21AA6-4110-4717-87FC-0F43B58DA03E}"/>
               </a:ext>
             </a:extLst>
           </p:cNvPr>
@@ -3324,7 +3324,7 @@
           <p:cNvPr id="2" name="">
             <a:extLst xmlns:a="http://schemas.openxmlformats.org/drawingml/2006/main">
               <a:ext uri="{FF2B5EF4-FFF2-40B4-BE49-F238E27FC236}">
-                <a16:creationId xmlns:a16="http://schemas.microsoft.com/office/drawing/2014/main" id="{6A0851C0-CB6E-43E1-93B9-3D6114D9A2AC}"/>
+                <a16:creationId xmlns:a16="http://schemas.microsoft.com/office/drawing/2014/main" id="{F79948E6-6B5E-4012-B5F5-BAF4BAD66E76}"/>
               </a:ext>
             </a:extLst>
           </p:cNvPr>
@@ -3381,7 +3381,7 @@
           <p:cNvPr id="3" name="">
             <a:extLst xmlns:a="http://schemas.openxmlformats.org/drawingml/2006/main">
               <a:ext uri="{FF2B5EF4-FFF2-40B4-BE49-F238E27FC236}">
-                <a16:creationId xmlns:a16="http://schemas.microsoft.com/office/drawing/2014/main" id="{F9337B0F-AF01-4876-B1FF-FEBEE9F77E04}"/>
+                <a16:creationId xmlns:a16="http://schemas.microsoft.com/office/drawing/2014/main" id="{E188263E-BD95-41BE-A300-F34A69EE7B49}"/>
               </a:ext>
             </a:extLst>
           </p:cNvPr>
@@ -3413,7 +3413,7 @@
           <p:cNvPr id="4" name="">
             <a:extLst xmlns:a="http://schemas.openxmlformats.org/drawingml/2006/main">
               <a:ext uri="{FF2B5EF4-FFF2-40B4-BE49-F238E27FC236}">
-                <a16:creationId xmlns:a16="http://schemas.microsoft.com/office/drawing/2014/main" id="{35730D90-9FD2-4A43-B08C-DE053617B4C1}"/>
+                <a16:creationId xmlns:a16="http://schemas.microsoft.com/office/drawing/2014/main" id="{A9E54FF4-DCB1-482D-8E9E-A56852DC4B96}"/>
               </a:ext>
             </a:extLst>
           </p:cNvPr>
@@ -3470,7 +3470,7 @@
           <p:cNvPr id="5" name="">
             <a:extLst xmlns:a="http://schemas.openxmlformats.org/drawingml/2006/main">
               <a:ext uri="{FF2B5EF4-FFF2-40B4-BE49-F238E27FC236}">
-                <a16:creationId xmlns:a16="http://schemas.microsoft.com/office/drawing/2014/main" id="{95B9CFC9-9940-4DC5-9940-E270B7588152}"/>
+                <a16:creationId xmlns:a16="http://schemas.microsoft.com/office/drawing/2014/main" id="{6215ED5A-FEF6-48F7-B36B-F4E8FC5D45AA}"/>
               </a:ext>
             </a:extLst>
           </p:cNvPr>
@@ -3527,7 +3527,7 @@
           <p:cNvPr id="6" name="">
             <a:extLst xmlns:a="http://schemas.openxmlformats.org/drawingml/2006/main">
               <a:ext uri="{FF2B5EF4-FFF2-40B4-BE49-F238E27FC236}">
-                <a16:creationId xmlns:a16="http://schemas.microsoft.com/office/drawing/2014/main" id="{C1C4F3F8-3AFB-449C-B9FA-DADF9D9459AE}"/>
+                <a16:creationId xmlns:a16="http://schemas.microsoft.com/office/drawing/2014/main" id="{EF403B57-9CC4-4D05-8ECB-FD3217429B75}"/>
               </a:ext>
             </a:extLst>
           </p:cNvPr>
@@ -3584,7 +3584,7 @@
           <p:cNvPr id="7" name="">
             <a:extLst xmlns:a="http://schemas.openxmlformats.org/drawingml/2006/main">
               <a:ext uri="{FF2B5EF4-FFF2-40B4-BE49-F238E27FC236}">
-                <a16:creationId xmlns:a16="http://schemas.microsoft.com/office/drawing/2014/main" id="{79BFA92F-90E0-4A44-87B1-5EDD3CCA48CE}"/>
+                <a16:creationId xmlns:a16="http://schemas.microsoft.com/office/drawing/2014/main" id="{A9D4FD16-AC41-405D-BF28-FFD113441F08}"/>
               </a:ext>
             </a:extLst>
           </p:cNvPr>
@@ -3616,7 +3616,7 @@
           <p:cNvPr id="8" name="">
             <a:extLst xmlns:a="http://schemas.openxmlformats.org/drawingml/2006/main">
               <a:ext uri="{FF2B5EF4-FFF2-40B4-BE49-F238E27FC236}">
-                <a16:creationId xmlns:a16="http://schemas.microsoft.com/office/drawing/2014/main" id="{B3F71AAD-14EB-4A3F-BF00-183F9CD4D22D}"/>
+                <a16:creationId xmlns:a16="http://schemas.microsoft.com/office/drawing/2014/main" id="{111A8B5B-DAF7-45F3-B89B-8054796808C6}"/>
               </a:ext>
             </a:extLst>
           </p:cNvPr>
@@ -3673,7 +3673,7 @@
           <p:cNvPr id="9" name="">
             <a:extLst xmlns:a="http://schemas.openxmlformats.org/drawingml/2006/main">
               <a:ext uri="{FF2B5EF4-FFF2-40B4-BE49-F238E27FC236}">
-                <a16:creationId xmlns:a16="http://schemas.microsoft.com/office/drawing/2014/main" id="{0792187A-FB04-443B-B666-171B3F0C2F49}"/>
+                <a16:creationId xmlns:a16="http://schemas.microsoft.com/office/drawing/2014/main" id="{4F43A491-6DE3-46EC-8552-B9E73BC08C7D}"/>
               </a:ext>
             </a:extLst>
           </p:cNvPr>
@@ -3730,7 +3730,7 @@
           <p:cNvPr id="10" name="">
             <a:extLst xmlns:a="http://schemas.openxmlformats.org/drawingml/2006/main">
               <a:ext uri="{FF2B5EF4-FFF2-40B4-BE49-F238E27FC236}">
-                <a16:creationId xmlns:a16="http://schemas.microsoft.com/office/drawing/2014/main" id="{EB56015C-0795-45AB-BAE1-1563E1763EE3}"/>
+                <a16:creationId xmlns:a16="http://schemas.microsoft.com/office/drawing/2014/main" id="{5AD7BDF1-BDC8-4E48-8DB9-F99FD8B88C08}"/>
               </a:ext>
             </a:extLst>
           </p:cNvPr>
@@ -3787,7 +3787,7 @@
           <p:cNvPr id="11" name="">
             <a:extLst xmlns:a="http://schemas.openxmlformats.org/drawingml/2006/main">
               <a:ext uri="{FF2B5EF4-FFF2-40B4-BE49-F238E27FC236}">
-                <a16:creationId xmlns:a16="http://schemas.microsoft.com/office/drawing/2014/main" id="{28CC19F8-ED87-454A-901C-4D26F72716CC}"/>
+                <a16:creationId xmlns:a16="http://schemas.microsoft.com/office/drawing/2014/main" id="{F13949BB-3B97-4A7B-9F21-D094B4585F38}"/>
               </a:ext>
             </a:extLst>
           </p:cNvPr>
@@ -3821,7 +3821,7 @@
           <p:cNvPr id="12" name="">
             <a:extLst xmlns:a="http://schemas.openxmlformats.org/drawingml/2006/main">
               <a:ext uri="{FF2B5EF4-FFF2-40B4-BE49-F238E27FC236}">
-                <a16:creationId xmlns:a16="http://schemas.microsoft.com/office/drawing/2014/main" id="{CB61C7CD-F001-40FC-8B05-E6A9FD7372EC}"/>
+                <a16:creationId xmlns:a16="http://schemas.microsoft.com/office/drawing/2014/main" id="{6AAE690B-9056-447C-BE29-F4DE735EBD19}"/>
               </a:ext>
             </a:extLst>
           </p:cNvPr>
@@ -3878,7 +3878,7 @@
           <p:cNvPr id="13" name="">
             <a:extLst xmlns:a="http://schemas.openxmlformats.org/drawingml/2006/main">
               <a:ext uri="{FF2B5EF4-FFF2-40B4-BE49-F238E27FC236}">
-                <a16:creationId xmlns:a16="http://schemas.microsoft.com/office/drawing/2014/main" id="{E7BC3F9A-95BE-40FE-BD1F-8DA50875AD56}"/>
+                <a16:creationId xmlns:a16="http://schemas.microsoft.com/office/drawing/2014/main" id="{E7F2C812-2E07-4A6A-9E02-7DEDD92FB6CC}"/>
               </a:ext>
             </a:extLst>
           </p:cNvPr>
@@ -3935,7 +3935,7 @@
           <p:cNvPr id="14" name="">
             <a:extLst xmlns:a="http://schemas.openxmlformats.org/drawingml/2006/main">
               <a:ext uri="{FF2B5EF4-FFF2-40B4-BE49-F238E27FC236}">
-                <a16:creationId xmlns:a16="http://schemas.microsoft.com/office/drawing/2014/main" id="{AEA18671-A13E-4909-86D9-67BB44B5C889}"/>
+                <a16:creationId xmlns:a16="http://schemas.microsoft.com/office/drawing/2014/main" id="{14655647-44D3-444E-800D-4ADAE271983B}"/>
               </a:ext>
             </a:extLst>
           </p:cNvPr>
@@ -3992,7 +3992,7 @@
           <p:cNvPr id="15" name="">
             <a:extLst xmlns:a="http://schemas.openxmlformats.org/drawingml/2006/main">
               <a:ext uri="{FF2B5EF4-FFF2-40B4-BE49-F238E27FC236}">
-                <a16:creationId xmlns:a16="http://schemas.microsoft.com/office/drawing/2014/main" id="{69B92BF4-E4C7-4638-80D7-25612ABA01E4}"/>
+                <a16:creationId xmlns:a16="http://schemas.microsoft.com/office/drawing/2014/main" id="{A2D7FF54-7CEA-47B2-93D4-BCB8B3971C37}"/>
               </a:ext>
             </a:extLst>
           </p:cNvPr>
@@ -4026,7 +4026,7 @@
           <p:cNvPr id="16" name="">
             <a:extLst xmlns:a="http://schemas.openxmlformats.org/drawingml/2006/main">
               <a:ext uri="{FF2B5EF4-FFF2-40B4-BE49-F238E27FC236}">
-                <a16:creationId xmlns:a16="http://schemas.microsoft.com/office/drawing/2014/main" id="{9CCF1717-FE96-4863-9FDF-EDC0DFD11C5D}"/>
+                <a16:creationId xmlns:a16="http://schemas.microsoft.com/office/drawing/2014/main" id="{0D492234-2F09-4BFE-B9A2-D9CDF7E19D22}"/>
               </a:ext>
             </a:extLst>
           </p:cNvPr>
@@ -4083,7 +4083,7 @@
           <p:cNvPr id="17" name="">
             <a:extLst xmlns:a="http://schemas.openxmlformats.org/drawingml/2006/main">
               <a:ext uri="{FF2B5EF4-FFF2-40B4-BE49-F238E27FC236}">
-                <a16:creationId xmlns:a16="http://schemas.microsoft.com/office/drawing/2014/main" id="{9C3D7328-0A30-4E27-A6AB-D635FC59772F}"/>
+                <a16:creationId xmlns:a16="http://schemas.microsoft.com/office/drawing/2014/main" id="{ADB424C8-4A36-4B1F-8E36-BF546C4D55F5}"/>
               </a:ext>
             </a:extLst>
           </p:cNvPr>
@@ -4140,7 +4140,7 @@
           <p:cNvPr id="18" name="">
             <a:extLst xmlns:a="http://schemas.openxmlformats.org/drawingml/2006/main">
               <a:ext uri="{FF2B5EF4-FFF2-40B4-BE49-F238E27FC236}">
-                <a16:creationId xmlns:a16="http://schemas.microsoft.com/office/drawing/2014/main" id="{578E7130-9DEF-40EC-8B29-54B0860599A1}"/>
+                <a16:creationId xmlns:a16="http://schemas.microsoft.com/office/drawing/2014/main" id="{ADBA8FCA-D67C-42BB-AA25-5BCE719A3658}"/>
               </a:ext>
             </a:extLst>
           </p:cNvPr>
@@ -4195,7 +4195,7 @@
     </p:spTree>
     <p:extLst>
       <p:ext uri="{BB962C8B-B14F-4D97-AF65-F5344CB8AC3E}">
-        <p14:creationId xmlns:p14="http://schemas.microsoft.com/office/powerpoint/2010/main" val="1811157181"/>
+        <p14:creationId xmlns:p14="http://schemas.microsoft.com/office/powerpoint/2010/main" val="392293179"/>
       </p:ext>
     </p:extLst>
   </p:cSld>
@@ -4350,7 +4350,7 @@
           <p:cNvPr id="23" name="">
             <a:extLst xmlns:a="http://schemas.openxmlformats.org/drawingml/2006/main">
               <a:ext uri="{FF2B5EF4-FFF2-40B4-BE49-F238E27FC236}">
-                <a16:creationId xmlns:a16="http://schemas.microsoft.com/office/drawing/2014/main" id="{E1142295-B839-4F6C-B9CE-4982D000EC3E}"/>
+                <a16:creationId xmlns:a16="http://schemas.microsoft.com/office/drawing/2014/main" id="{79827BDC-CE40-47E3-A2BC-5BCF9ECB5D3D}"/>
               </a:ext>
             </a:extLst>
           </p:cNvPr>
@@ -4382,7 +4382,7 @@
           <p:cNvPr id="2" name="">
             <a:extLst xmlns:a="http://schemas.openxmlformats.org/drawingml/2006/main">
               <a:ext uri="{FF2B5EF4-FFF2-40B4-BE49-F238E27FC236}">
-                <a16:creationId xmlns:a16="http://schemas.microsoft.com/office/drawing/2014/main" id="{1E0D8A28-083C-46FD-BA4C-D459D9684678}"/>
+                <a16:creationId xmlns:a16="http://schemas.microsoft.com/office/drawing/2014/main" id="{F3F98BB7-1D2B-42D9-B2D9-329D48D97764}"/>
               </a:ext>
             </a:extLst>
           </p:cNvPr>
@@ -4439,7 +4439,7 @@
           <p:cNvPr id="3" name="">
             <a:extLst xmlns:a="http://schemas.openxmlformats.org/drawingml/2006/main">
               <a:ext uri="{FF2B5EF4-FFF2-40B4-BE49-F238E27FC236}">
-                <a16:creationId xmlns:a16="http://schemas.microsoft.com/office/drawing/2014/main" id="{4C40295C-8391-45E7-BF9A-67BDA364D78D}"/>
+                <a16:creationId xmlns:a16="http://schemas.microsoft.com/office/drawing/2014/main" id="{DE593248-D5BD-4E7F-8BC3-9D610AC16630}"/>
               </a:ext>
             </a:extLst>
           </p:cNvPr>
@@ -4471,7 +4471,7 @@
           <p:cNvPr id="4" name="">
             <a:extLst xmlns:a="http://schemas.openxmlformats.org/drawingml/2006/main">
               <a:ext uri="{FF2B5EF4-FFF2-40B4-BE49-F238E27FC236}">
-                <a16:creationId xmlns:a16="http://schemas.microsoft.com/office/drawing/2014/main" id="{1D886ACD-1028-44D6-8BC7-31187B10475F}"/>
+                <a16:creationId xmlns:a16="http://schemas.microsoft.com/office/drawing/2014/main" id="{0DD3B12C-902F-413F-8BC3-A0F291F72A3C}"/>
               </a:ext>
             </a:extLst>
           </p:cNvPr>
@@ -4528,7 +4528,7 @@
           <p:cNvPr id="5" name="">
             <a:extLst xmlns:a="http://schemas.openxmlformats.org/drawingml/2006/main">
               <a:ext uri="{FF2B5EF4-FFF2-40B4-BE49-F238E27FC236}">
-                <a16:creationId xmlns:a16="http://schemas.microsoft.com/office/drawing/2014/main" id="{549A8603-E716-4A37-BFA0-A40415969A80}"/>
+                <a16:creationId xmlns:a16="http://schemas.microsoft.com/office/drawing/2014/main" id="{F9B23A7C-A253-4094-BA35-F03876CF5372}"/>
               </a:ext>
             </a:extLst>
           </p:cNvPr>
@@ -4585,7 +4585,7 @@
           <p:cNvPr id="6" name="">
             <a:extLst xmlns:a="http://schemas.openxmlformats.org/drawingml/2006/main">
               <a:ext uri="{FF2B5EF4-FFF2-40B4-BE49-F238E27FC236}">
-                <a16:creationId xmlns:a16="http://schemas.microsoft.com/office/drawing/2014/main" id="{EE5CC733-50C7-4D6D-872D-5963C66F95BC}"/>
+                <a16:creationId xmlns:a16="http://schemas.microsoft.com/office/drawing/2014/main" id="{CCB4507B-5121-4782-9AFD-148110314F98}"/>
               </a:ext>
             </a:extLst>
           </p:cNvPr>
@@ -4642,7 +4642,7 @@
           <p:cNvPr id="7" name="">
             <a:extLst xmlns:a="http://schemas.openxmlformats.org/drawingml/2006/main">
               <a:ext uri="{FF2B5EF4-FFF2-40B4-BE49-F238E27FC236}">
-                <a16:creationId xmlns:a16="http://schemas.microsoft.com/office/drawing/2014/main" id="{86758B72-D7FD-4281-B7B6-5E957945C034}"/>
+                <a16:creationId xmlns:a16="http://schemas.microsoft.com/office/drawing/2014/main" id="{70F20838-1CC3-4547-873F-ACCC1261B286}"/>
               </a:ext>
             </a:extLst>
           </p:cNvPr>
@@ -4674,7 +4674,7 @@
           <p:cNvPr id="8" name="">
             <a:extLst xmlns:a="http://schemas.openxmlformats.org/drawingml/2006/main">
               <a:ext uri="{FF2B5EF4-FFF2-40B4-BE49-F238E27FC236}">
-                <a16:creationId xmlns:a16="http://schemas.microsoft.com/office/drawing/2014/main" id="{C00F5601-FD54-411F-953B-EAA40E107B5B}"/>
+                <a16:creationId xmlns:a16="http://schemas.microsoft.com/office/drawing/2014/main" id="{8775FD7F-9418-4198-B558-7094E1F077A5}"/>
               </a:ext>
             </a:extLst>
           </p:cNvPr>
@@ -4731,7 +4731,7 @@
           <p:cNvPr id="9" name="">
             <a:extLst xmlns:a="http://schemas.openxmlformats.org/drawingml/2006/main">
               <a:ext uri="{FF2B5EF4-FFF2-40B4-BE49-F238E27FC236}">
-                <a16:creationId xmlns:a16="http://schemas.microsoft.com/office/drawing/2014/main" id="{9B4EA921-D7E9-49EF-936E-19E5C7292EB9}"/>
+                <a16:creationId xmlns:a16="http://schemas.microsoft.com/office/drawing/2014/main" id="{2825A012-D568-4F35-B5B4-F9EFD1CD2329}"/>
               </a:ext>
             </a:extLst>
           </p:cNvPr>
@@ -4788,7 +4788,7 @@
           <p:cNvPr id="10" name="">
             <a:extLst xmlns:a="http://schemas.openxmlformats.org/drawingml/2006/main">
               <a:ext uri="{FF2B5EF4-FFF2-40B4-BE49-F238E27FC236}">
-                <a16:creationId xmlns:a16="http://schemas.microsoft.com/office/drawing/2014/main" id="{E98418B1-CE17-4543-842D-F342CBC2E145}"/>
+                <a16:creationId xmlns:a16="http://schemas.microsoft.com/office/drawing/2014/main" id="{838B1C11-8DE2-44EE-B1F5-A45CC704A048}"/>
               </a:ext>
             </a:extLst>
           </p:cNvPr>
@@ -4822,7 +4822,7 @@
           <p:cNvPr id="11" name="">
             <a:extLst xmlns:a="http://schemas.openxmlformats.org/drawingml/2006/main">
               <a:ext uri="{FF2B5EF4-FFF2-40B4-BE49-F238E27FC236}">
-                <a16:creationId xmlns:a16="http://schemas.microsoft.com/office/drawing/2014/main" id="{A8C47FD7-6C88-4153-82F0-FD8F6F95BB4B}"/>
+                <a16:creationId xmlns:a16="http://schemas.microsoft.com/office/drawing/2014/main" id="{96A86DAC-00D2-4043-9257-2D9D2377A5B4}"/>
               </a:ext>
             </a:extLst>
           </p:cNvPr>
@@ -4854,7 +4854,7 @@
           <p:cNvPr id="12" name="">
             <a:extLst xmlns:a="http://schemas.openxmlformats.org/drawingml/2006/main">
               <a:ext uri="{FF2B5EF4-FFF2-40B4-BE49-F238E27FC236}">
-                <a16:creationId xmlns:a16="http://schemas.microsoft.com/office/drawing/2014/main" id="{FFB361AE-315E-4B31-AA06-A2E2CB9DC49E}"/>
+                <a16:creationId xmlns:a16="http://schemas.microsoft.com/office/drawing/2014/main" id="{F477977E-2498-4D97-BD98-1516AAC52907}"/>
               </a:ext>
             </a:extLst>
           </p:cNvPr>
@@ -4911,7 +4911,7 @@
           <p:cNvPr id="13" name="">
             <a:extLst xmlns:a="http://schemas.openxmlformats.org/drawingml/2006/main">
               <a:ext uri="{FF2B5EF4-FFF2-40B4-BE49-F238E27FC236}">
-                <a16:creationId xmlns:a16="http://schemas.microsoft.com/office/drawing/2014/main" id="{3660BF40-6F7F-47FD-9ED0-D8F0A6A67B1A}"/>
+                <a16:creationId xmlns:a16="http://schemas.microsoft.com/office/drawing/2014/main" id="{8401A17C-E2B5-4C36-914B-1DD704C1D255}"/>
               </a:ext>
             </a:extLst>
           </p:cNvPr>
@@ -4968,7 +4968,7 @@
           <p:cNvPr id="14" name="">
             <a:extLst xmlns:a="http://schemas.openxmlformats.org/drawingml/2006/main">
               <a:ext uri="{FF2B5EF4-FFF2-40B4-BE49-F238E27FC236}">
-                <a16:creationId xmlns:a16="http://schemas.microsoft.com/office/drawing/2014/main" id="{E21FC9C3-9CEF-4EE1-A9EA-E8DE83924010}"/>
+                <a16:creationId xmlns:a16="http://schemas.microsoft.com/office/drawing/2014/main" id="{D30C0713-8FD8-4A7C-8FD6-F30A8EC3FEF2}"/>
               </a:ext>
             </a:extLst>
           </p:cNvPr>
@@ -5002,7 +5002,7 @@
           <p:cNvPr id="15" name="">
             <a:extLst xmlns:a="http://schemas.openxmlformats.org/drawingml/2006/main">
               <a:ext uri="{FF2B5EF4-FFF2-40B4-BE49-F238E27FC236}">
-                <a16:creationId xmlns:a16="http://schemas.microsoft.com/office/drawing/2014/main" id="{D9A8DF75-3B3F-4D4D-8B62-3ABE6186CA23}"/>
+                <a16:creationId xmlns:a16="http://schemas.microsoft.com/office/drawing/2014/main" id="{C35A33AB-E8F8-487C-B154-5A5F9E6FBC31}"/>
               </a:ext>
             </a:extLst>
           </p:cNvPr>
@@ -5034,7 +5034,7 @@
           <p:cNvPr id="16" name="">
             <a:extLst xmlns:a="http://schemas.openxmlformats.org/drawingml/2006/main">
               <a:ext uri="{FF2B5EF4-FFF2-40B4-BE49-F238E27FC236}">
-                <a16:creationId xmlns:a16="http://schemas.microsoft.com/office/drawing/2014/main" id="{99A592C6-4E0E-4C89-B7D0-010D5653A04F}"/>
+                <a16:creationId xmlns:a16="http://schemas.microsoft.com/office/drawing/2014/main" id="{F8A473C4-CE16-408D-B925-760A9D944CF3}"/>
               </a:ext>
             </a:extLst>
           </p:cNvPr>
@@ -5091,7 +5091,7 @@
           <p:cNvPr id="17" name="">
             <a:extLst xmlns:a="http://schemas.openxmlformats.org/drawingml/2006/main">
               <a:ext uri="{FF2B5EF4-FFF2-40B4-BE49-F238E27FC236}">
-                <a16:creationId xmlns:a16="http://schemas.microsoft.com/office/drawing/2014/main" id="{A97F4FD3-5E75-4F11-9177-DE51BB8CAC83}"/>
+                <a16:creationId xmlns:a16="http://schemas.microsoft.com/office/drawing/2014/main" id="{6306FC14-9A2B-410F-8226-1E83CBB8C4EC}"/>
               </a:ext>
             </a:extLst>
           </p:cNvPr>
@@ -5148,7 +5148,7 @@
           <p:cNvPr id="18" name="">
             <a:extLst xmlns:a="http://schemas.openxmlformats.org/drawingml/2006/main">
               <a:ext uri="{FF2B5EF4-FFF2-40B4-BE49-F238E27FC236}">
-                <a16:creationId xmlns:a16="http://schemas.microsoft.com/office/drawing/2014/main" id="{ACBF9BC6-2E39-4ED1-9C5E-10A22F12F4F6}"/>
+                <a16:creationId xmlns:a16="http://schemas.microsoft.com/office/drawing/2014/main" id="{CC0FD58A-07B1-4BD4-9682-8ACF5C6261DD}"/>
               </a:ext>
             </a:extLst>
           </p:cNvPr>
@@ -5182,7 +5182,7 @@
           <p:cNvPr id="19" name="">
             <a:extLst xmlns:a="http://schemas.openxmlformats.org/drawingml/2006/main">
               <a:ext uri="{FF2B5EF4-FFF2-40B4-BE49-F238E27FC236}">
-                <a16:creationId xmlns:a16="http://schemas.microsoft.com/office/drawing/2014/main" id="{FE7A0DAD-B635-445E-81B1-CB99D2B1E9CA}"/>
+                <a16:creationId xmlns:a16="http://schemas.microsoft.com/office/drawing/2014/main" id="{18F93AF0-A76D-4786-A267-60A1A8AC9620}"/>
               </a:ext>
             </a:extLst>
           </p:cNvPr>
@@ -5214,7 +5214,7 @@
           <p:cNvPr id="20" name="">
             <a:extLst xmlns:a="http://schemas.openxmlformats.org/drawingml/2006/main">
               <a:ext uri="{FF2B5EF4-FFF2-40B4-BE49-F238E27FC236}">
-                <a16:creationId xmlns:a16="http://schemas.microsoft.com/office/drawing/2014/main" id="{52166351-DD5C-4988-85CA-2787325E6DA8}"/>
+                <a16:creationId xmlns:a16="http://schemas.microsoft.com/office/drawing/2014/main" id="{EDFE0615-B108-4839-A2C8-202A73D18685}"/>
               </a:ext>
             </a:extLst>
           </p:cNvPr>
@@ -5271,7 +5271,7 @@
           <p:cNvPr id="21" name="">
             <a:extLst xmlns:a="http://schemas.openxmlformats.org/drawingml/2006/main">
               <a:ext uri="{FF2B5EF4-FFF2-40B4-BE49-F238E27FC236}">
-                <a16:creationId xmlns:a16="http://schemas.microsoft.com/office/drawing/2014/main" id="{18EBFE35-CA0D-44DA-BBB3-D6020EEAA7C1}"/>
+                <a16:creationId xmlns:a16="http://schemas.microsoft.com/office/drawing/2014/main" id="{50E0E755-A324-4F32-8193-710EFA9112D4}"/>
               </a:ext>
             </a:extLst>
           </p:cNvPr>
@@ -5328,7 +5328,7 @@
           <p:cNvPr id="22" name="">
             <a:extLst xmlns:a="http://schemas.openxmlformats.org/drawingml/2006/main">
               <a:ext uri="{FF2B5EF4-FFF2-40B4-BE49-F238E27FC236}">
-                <a16:creationId xmlns:a16="http://schemas.microsoft.com/office/drawing/2014/main" id="{90F50939-DC65-4D53-B647-96641BD5787D}"/>
+                <a16:creationId xmlns:a16="http://schemas.microsoft.com/office/drawing/2014/main" id="{8026BCF5-7398-4492-8B1C-2EAC272B0536}"/>
               </a:ext>
             </a:extLst>
           </p:cNvPr>
@@ -5383,7 +5383,7 @@
     </p:spTree>
     <p:extLst>
       <p:ext uri="{BB962C8B-B14F-4D97-AF65-F5344CB8AC3E}">
-        <p14:creationId xmlns:p14="http://schemas.microsoft.com/office/powerpoint/2010/main" val="741630112"/>
+        <p14:creationId xmlns:p14="http://schemas.microsoft.com/office/powerpoint/2010/main" val="665691522"/>
       </p:ext>
     </p:extLst>
   </p:cSld>
@@ -5584,7 +5584,7 @@
           <p:cNvPr id="23" name="">
             <a:extLst xmlns:a="http://schemas.openxmlformats.org/drawingml/2006/main">
               <a:ext uri="{FF2B5EF4-FFF2-40B4-BE49-F238E27FC236}">
-                <a16:creationId xmlns:a16="http://schemas.microsoft.com/office/drawing/2014/main" id="{D7A4BAE7-BFD7-4BBB-879D-5331D24A6D4D}"/>
+                <a16:creationId xmlns:a16="http://schemas.microsoft.com/office/drawing/2014/main" id="{325BB1E3-B0E7-4676-A6EB-53348819921A}"/>
               </a:ext>
             </a:extLst>
           </p:cNvPr>
@@ -5616,7 +5616,7 @@
           <p:cNvPr id="2" name="">
             <a:extLst xmlns:a="http://schemas.openxmlformats.org/drawingml/2006/main">
               <a:ext uri="{FF2B5EF4-FFF2-40B4-BE49-F238E27FC236}">
-                <a16:creationId xmlns:a16="http://schemas.microsoft.com/office/drawing/2014/main" id="{83DE67F5-87BD-4782-A2D8-605BE86E4C3D}"/>
+                <a16:creationId xmlns:a16="http://schemas.microsoft.com/office/drawing/2014/main" id="{3D7FC687-0D61-4E00-B85B-A21AFE379D1A}"/>
               </a:ext>
             </a:extLst>
           </p:cNvPr>
@@ -5673,7 +5673,7 @@
           <p:cNvPr id="3" name="">
             <a:extLst xmlns:a="http://schemas.openxmlformats.org/drawingml/2006/main">
               <a:ext uri="{FF2B5EF4-FFF2-40B4-BE49-F238E27FC236}">
-                <a16:creationId xmlns:a16="http://schemas.microsoft.com/office/drawing/2014/main" id="{21D45C37-2A12-4E6C-8B0E-60FA0CEBCE3E}"/>
+                <a16:creationId xmlns:a16="http://schemas.microsoft.com/office/drawing/2014/main" id="{A044EDE2-8ABF-458E-9B12-7BD0DE74C16F}"/>
               </a:ext>
             </a:extLst>
           </p:cNvPr>
@@ -5705,7 +5705,7 @@
           <p:cNvPr id="4" name="">
             <a:extLst xmlns:a="http://schemas.openxmlformats.org/drawingml/2006/main">
               <a:ext uri="{FF2B5EF4-FFF2-40B4-BE49-F238E27FC236}">
-                <a16:creationId xmlns:a16="http://schemas.microsoft.com/office/drawing/2014/main" id="{2E7EFAA1-A918-4C5F-BEE6-64E08F712F38}"/>
+                <a16:creationId xmlns:a16="http://schemas.microsoft.com/office/drawing/2014/main" id="{290AAD5D-53A8-4ECD-9495-2CBF3A3734DB}"/>
               </a:ext>
             </a:extLst>
           </p:cNvPr>
@@ -5762,7 +5762,7 @@
           <p:cNvPr id="5" name="">
             <a:extLst xmlns:a="http://schemas.openxmlformats.org/drawingml/2006/main">
               <a:ext uri="{FF2B5EF4-FFF2-40B4-BE49-F238E27FC236}">
-                <a16:creationId xmlns:a16="http://schemas.microsoft.com/office/drawing/2014/main" id="{9D13CC57-D5D1-4E5B-8366-315C73F75717}"/>
+                <a16:creationId xmlns:a16="http://schemas.microsoft.com/office/drawing/2014/main" id="{6F7F7435-0688-4C7C-AB79-B46D107C4FBC}"/>
               </a:ext>
             </a:extLst>
           </p:cNvPr>
@@ -5819,7 +5819,7 @@
           <p:cNvPr id="6" name="">
             <a:extLst xmlns:a="http://schemas.openxmlformats.org/drawingml/2006/main">
               <a:ext uri="{FF2B5EF4-FFF2-40B4-BE49-F238E27FC236}">
-                <a16:creationId xmlns:a16="http://schemas.microsoft.com/office/drawing/2014/main" id="{3F2D776D-FFAE-44D7-B4F6-0DB5D449632F}"/>
+                <a16:creationId xmlns:a16="http://schemas.microsoft.com/office/drawing/2014/main" id="{224AFE59-7320-4A86-8CF6-769A8665C3FA}"/>
               </a:ext>
             </a:extLst>
           </p:cNvPr>
@@ -5876,7 +5876,7 @@
           <p:cNvPr id="7" name="">
             <a:extLst xmlns:a="http://schemas.openxmlformats.org/drawingml/2006/main">
               <a:ext uri="{FF2B5EF4-FFF2-40B4-BE49-F238E27FC236}">
-                <a16:creationId xmlns:a16="http://schemas.microsoft.com/office/drawing/2014/main" id="{0DFDCFEE-03BE-4954-810F-D38DB5F1B4B5}"/>
+                <a16:creationId xmlns:a16="http://schemas.microsoft.com/office/drawing/2014/main" id="{0AB96ACB-281E-43B9-B28F-1FB909A9732D}"/>
               </a:ext>
             </a:extLst>
           </p:cNvPr>
@@ -5908,7 +5908,7 @@
           <p:cNvPr id="8" name="">
             <a:extLst xmlns:a="http://schemas.openxmlformats.org/drawingml/2006/main">
               <a:ext uri="{FF2B5EF4-FFF2-40B4-BE49-F238E27FC236}">
-                <a16:creationId xmlns:a16="http://schemas.microsoft.com/office/drawing/2014/main" id="{FDA89FC7-05D2-4ED5-9656-2D377730F1C5}"/>
+                <a16:creationId xmlns:a16="http://schemas.microsoft.com/office/drawing/2014/main" id="{203C0090-9525-42E3-8B93-8165EEA84D27}"/>
               </a:ext>
             </a:extLst>
           </p:cNvPr>
@@ -5965,7 +5965,7 @@
           <p:cNvPr id="9" name="">
             <a:extLst xmlns:a="http://schemas.openxmlformats.org/drawingml/2006/main">
               <a:ext uri="{FF2B5EF4-FFF2-40B4-BE49-F238E27FC236}">
-                <a16:creationId xmlns:a16="http://schemas.microsoft.com/office/drawing/2014/main" id="{947ADDDF-D42A-4FB7-AB0C-05C44A571522}"/>
+                <a16:creationId xmlns:a16="http://schemas.microsoft.com/office/drawing/2014/main" id="{3AFB63F5-1C37-4F2F-BC66-F7DD1FEB9F01}"/>
               </a:ext>
             </a:extLst>
           </p:cNvPr>
@@ -6022,7 +6022,7 @@
           <p:cNvPr id="10" name="">
             <a:extLst xmlns:a="http://schemas.openxmlformats.org/drawingml/2006/main">
               <a:ext uri="{FF2B5EF4-FFF2-40B4-BE49-F238E27FC236}">
-                <a16:creationId xmlns:a16="http://schemas.microsoft.com/office/drawing/2014/main" id="{00F3555B-C8D4-4DAB-ACFE-2272F468FD42}"/>
+                <a16:creationId xmlns:a16="http://schemas.microsoft.com/office/drawing/2014/main" id="{B3A1FAF9-D403-4C7F-AE45-4C26666A469A}"/>
               </a:ext>
             </a:extLst>
           </p:cNvPr>
@@ -6056,7 +6056,7 @@
           <p:cNvPr id="11" name="">
             <a:extLst xmlns:a="http://schemas.openxmlformats.org/drawingml/2006/main">
               <a:ext uri="{FF2B5EF4-FFF2-40B4-BE49-F238E27FC236}">
-                <a16:creationId xmlns:a16="http://schemas.microsoft.com/office/drawing/2014/main" id="{04820B0B-5213-40AE-9C95-E49B91E72D42}"/>
+                <a16:creationId xmlns:a16="http://schemas.microsoft.com/office/drawing/2014/main" id="{48BC460E-746B-49B3-80D4-00F7B8A2F3BD}"/>
               </a:ext>
             </a:extLst>
           </p:cNvPr>
@@ -6088,7 +6088,7 @@
           <p:cNvPr id="12" name="">
             <a:extLst xmlns:a="http://schemas.openxmlformats.org/drawingml/2006/main">
               <a:ext uri="{FF2B5EF4-FFF2-40B4-BE49-F238E27FC236}">
-                <a16:creationId xmlns:a16="http://schemas.microsoft.com/office/drawing/2014/main" id="{3DB01BD8-66CE-4DA3-898B-A47080CA33F6}"/>
+                <a16:creationId xmlns:a16="http://schemas.microsoft.com/office/drawing/2014/main" id="{E8029B66-CD8C-460E-8F90-DC37E2DD2F9A}"/>
               </a:ext>
             </a:extLst>
           </p:cNvPr>
@@ -6145,7 +6145,7 @@
           <p:cNvPr id="13" name="">
             <a:extLst xmlns:a="http://schemas.openxmlformats.org/drawingml/2006/main">
               <a:ext uri="{FF2B5EF4-FFF2-40B4-BE49-F238E27FC236}">
-                <a16:creationId xmlns:a16="http://schemas.microsoft.com/office/drawing/2014/main" id="{6D4B5FFE-D280-4410-8014-2148C4C79D9A}"/>
+                <a16:creationId xmlns:a16="http://schemas.microsoft.com/office/drawing/2014/main" id="{7FE5BF00-441F-4FE1-AE7E-E625F6E97183}"/>
               </a:ext>
             </a:extLst>
           </p:cNvPr>
@@ -6202,7 +6202,7 @@
           <p:cNvPr id="14" name="">
             <a:extLst xmlns:a="http://schemas.openxmlformats.org/drawingml/2006/main">
               <a:ext uri="{FF2B5EF4-FFF2-40B4-BE49-F238E27FC236}">
-                <a16:creationId xmlns:a16="http://schemas.microsoft.com/office/drawing/2014/main" id="{4B053C70-A9B8-498E-AEFC-DA84401C9E4A}"/>
+                <a16:creationId xmlns:a16="http://schemas.microsoft.com/office/drawing/2014/main" id="{06DE13C8-9557-403E-A2D8-76F554007A24}"/>
               </a:ext>
             </a:extLst>
           </p:cNvPr>
@@ -6236,7 +6236,7 @@
           <p:cNvPr id="15" name="">
             <a:extLst xmlns:a="http://schemas.openxmlformats.org/drawingml/2006/main">
               <a:ext uri="{FF2B5EF4-FFF2-40B4-BE49-F238E27FC236}">
-                <a16:creationId xmlns:a16="http://schemas.microsoft.com/office/drawing/2014/main" id="{585AF1FF-4752-4ACA-84AC-FE96B71891B5}"/>
+                <a16:creationId xmlns:a16="http://schemas.microsoft.com/office/drawing/2014/main" id="{3718354B-AC17-4E0E-A7D4-7C76EEA55397}"/>
               </a:ext>
             </a:extLst>
           </p:cNvPr>
@@ -6268,7 +6268,7 @@
           <p:cNvPr id="16" name="">
             <a:extLst xmlns:a="http://schemas.openxmlformats.org/drawingml/2006/main">
               <a:ext uri="{FF2B5EF4-FFF2-40B4-BE49-F238E27FC236}">
-                <a16:creationId xmlns:a16="http://schemas.microsoft.com/office/drawing/2014/main" id="{6FEF35E4-FB9D-44D2-88B3-82ED362AC616}"/>
+                <a16:creationId xmlns:a16="http://schemas.microsoft.com/office/drawing/2014/main" id="{09CEFD51-FE89-4B99-AFA2-4317E854BF33}"/>
               </a:ext>
             </a:extLst>
           </p:cNvPr>
@@ -6325,7 +6325,7 @@
           <p:cNvPr id="17" name="">
             <a:extLst xmlns:a="http://schemas.openxmlformats.org/drawingml/2006/main">
               <a:ext uri="{FF2B5EF4-FFF2-40B4-BE49-F238E27FC236}">
-                <a16:creationId xmlns:a16="http://schemas.microsoft.com/office/drawing/2014/main" id="{49090301-A443-4583-A1A3-635C09F1D94B}"/>
+                <a16:creationId xmlns:a16="http://schemas.microsoft.com/office/drawing/2014/main" id="{F95C5BC3-FCBF-4CD8-8BE4-5D70D476B6B8}"/>
               </a:ext>
             </a:extLst>
           </p:cNvPr>
@@ -6382,7 +6382,7 @@
           <p:cNvPr id="18" name="">
             <a:extLst xmlns:a="http://schemas.openxmlformats.org/drawingml/2006/main">
               <a:ext uri="{FF2B5EF4-FFF2-40B4-BE49-F238E27FC236}">
-                <a16:creationId xmlns:a16="http://schemas.microsoft.com/office/drawing/2014/main" id="{F70C07A6-853A-4878-BD6D-475F662E5F30}"/>
+                <a16:creationId xmlns:a16="http://schemas.microsoft.com/office/drawing/2014/main" id="{E46FDA29-F411-41E5-BF67-5FFA571A7A96}"/>
               </a:ext>
             </a:extLst>
           </p:cNvPr>
@@ -6416,7 +6416,7 @@
           <p:cNvPr id="19" name="">
             <a:extLst xmlns:a="http://schemas.openxmlformats.org/drawingml/2006/main">
               <a:ext uri="{FF2B5EF4-FFF2-40B4-BE49-F238E27FC236}">
-                <a16:creationId xmlns:a16="http://schemas.microsoft.com/office/drawing/2014/main" id="{86B85DD3-1415-4F51-85AE-F8D15F6BE24B}"/>
+                <a16:creationId xmlns:a16="http://schemas.microsoft.com/office/drawing/2014/main" id="{E237FA48-3232-4706-AE75-EA9F0FACB544}"/>
               </a:ext>
             </a:extLst>
           </p:cNvPr>
@@ -6448,7 +6448,7 @@
           <p:cNvPr id="20" name="">
             <a:extLst xmlns:a="http://schemas.openxmlformats.org/drawingml/2006/main">
               <a:ext uri="{FF2B5EF4-FFF2-40B4-BE49-F238E27FC236}">
-                <a16:creationId xmlns:a16="http://schemas.microsoft.com/office/drawing/2014/main" id="{FD6E1725-53B2-4CFF-9EA9-64048EED6A31}"/>
+                <a16:creationId xmlns:a16="http://schemas.microsoft.com/office/drawing/2014/main" id="{08EC5445-805F-4D70-AC3B-21358665E0C8}"/>
               </a:ext>
             </a:extLst>
           </p:cNvPr>
@@ -6505,7 +6505,7 @@
           <p:cNvPr id="21" name="">
             <a:extLst xmlns:a="http://schemas.openxmlformats.org/drawingml/2006/main">
               <a:ext uri="{FF2B5EF4-FFF2-40B4-BE49-F238E27FC236}">
-                <a16:creationId xmlns:a16="http://schemas.microsoft.com/office/drawing/2014/main" id="{EDF4E0CF-6A0E-41FC-9275-59A1339A8811}"/>
+                <a16:creationId xmlns:a16="http://schemas.microsoft.com/office/drawing/2014/main" id="{AB7F56F7-7D1C-4C9B-8CC0-7DEEA224119C}"/>
               </a:ext>
             </a:extLst>
           </p:cNvPr>
@@ -6562,7 +6562,7 @@
           <p:cNvPr id="22" name="">
             <a:extLst xmlns:a="http://schemas.openxmlformats.org/drawingml/2006/main">
               <a:ext uri="{FF2B5EF4-FFF2-40B4-BE49-F238E27FC236}">
-                <a16:creationId xmlns:a16="http://schemas.microsoft.com/office/drawing/2014/main" id="{37BEF896-A61B-44D9-937C-DA72DD955FF6}"/>
+                <a16:creationId xmlns:a16="http://schemas.microsoft.com/office/drawing/2014/main" id="{74D0A5E3-E02F-4AF2-98FE-D54677FE3E72}"/>
               </a:ext>
             </a:extLst>
           </p:cNvPr>
@@ -6617,7 +6617,7 @@
     </p:spTree>
     <p:extLst>
       <p:ext uri="{BB962C8B-B14F-4D97-AF65-F5344CB8AC3E}">
-        <p14:creationId xmlns:p14="http://schemas.microsoft.com/office/powerpoint/2010/main" val="427286317"/>
+        <p14:creationId xmlns:p14="http://schemas.microsoft.com/office/powerpoint/2010/main" val="1550890483"/>
       </p:ext>
     </p:extLst>
   </p:cSld>
@@ -6818,7 +6818,7 @@
           <p:cNvPr id="16" name="">
             <a:extLst xmlns:a="http://schemas.openxmlformats.org/drawingml/2006/main">
               <a:ext uri="{FF2B5EF4-FFF2-40B4-BE49-F238E27FC236}">
-                <a16:creationId xmlns:a16="http://schemas.microsoft.com/office/drawing/2014/main" id="{527CF79E-FFC8-476D-86BF-5D61A136D978}"/>
+                <a16:creationId xmlns:a16="http://schemas.microsoft.com/office/drawing/2014/main" id="{0B0834F3-7920-4CE0-8BF1-AE0C8CE2B394}"/>
               </a:ext>
             </a:extLst>
           </p:cNvPr>
@@ -6850,7 +6850,7 @@
           <p:cNvPr id="2" name="">
             <a:extLst xmlns:a="http://schemas.openxmlformats.org/drawingml/2006/main">
               <a:ext uri="{FF2B5EF4-FFF2-40B4-BE49-F238E27FC236}">
-                <a16:creationId xmlns:a16="http://schemas.microsoft.com/office/drawing/2014/main" id="{502966FF-BF4D-43CF-BC28-EC0F5231E3FE}"/>
+                <a16:creationId xmlns:a16="http://schemas.microsoft.com/office/drawing/2014/main" id="{5EDACAF4-D64E-46F2-9D1D-2B2E14E9DA60}"/>
               </a:ext>
             </a:extLst>
           </p:cNvPr>
@@ -6907,7 +6907,7 @@
           <p:cNvPr id="3" name="">
             <a:extLst xmlns:a="http://schemas.openxmlformats.org/drawingml/2006/main">
               <a:ext uri="{FF2B5EF4-FFF2-40B4-BE49-F238E27FC236}">
-                <a16:creationId xmlns:a16="http://schemas.microsoft.com/office/drawing/2014/main" id="{4529CA4F-9E4B-4987-B239-06220E0829C0}"/>
+                <a16:creationId xmlns:a16="http://schemas.microsoft.com/office/drawing/2014/main" id="{34AD8017-D0CA-49FF-B295-CB4B3DA8A1C0}"/>
               </a:ext>
             </a:extLst>
           </p:cNvPr>
@@ -6939,7 +6939,7 @@
           <p:cNvPr id="4" name="">
             <a:extLst xmlns:a="http://schemas.openxmlformats.org/drawingml/2006/main">
               <a:ext uri="{FF2B5EF4-FFF2-40B4-BE49-F238E27FC236}">
-                <a16:creationId xmlns:a16="http://schemas.microsoft.com/office/drawing/2014/main" id="{2E534A26-1552-458F-8258-AE748728F9B2}"/>
+                <a16:creationId xmlns:a16="http://schemas.microsoft.com/office/drawing/2014/main" id="{9C69A947-B58F-4404-9198-8024FE85D216}"/>
               </a:ext>
             </a:extLst>
           </p:cNvPr>
@@ -6996,7 +6996,7 @@
           <p:cNvPr id="5" name="">
             <a:extLst xmlns:a="http://schemas.openxmlformats.org/drawingml/2006/main">
               <a:ext uri="{FF2B5EF4-FFF2-40B4-BE49-F238E27FC236}">
-                <a16:creationId xmlns:a16="http://schemas.microsoft.com/office/drawing/2014/main" id="{E46FBEE5-A6B0-4157-81DB-D610D34440EF}"/>
+                <a16:creationId xmlns:a16="http://schemas.microsoft.com/office/drawing/2014/main" id="{0B20EC0D-E965-49B6-9504-9F3E01041033}"/>
               </a:ext>
             </a:extLst>
           </p:cNvPr>
@@ -7053,7 +7053,7 @@
           <p:cNvPr id="6" name="">
             <a:extLst xmlns:a="http://schemas.openxmlformats.org/drawingml/2006/main">
               <a:ext uri="{FF2B5EF4-FFF2-40B4-BE49-F238E27FC236}">
-                <a16:creationId xmlns:a16="http://schemas.microsoft.com/office/drawing/2014/main" id="{D416BCB7-E1ED-4875-8C04-E3BE8D34E93E}"/>
+                <a16:creationId xmlns:a16="http://schemas.microsoft.com/office/drawing/2014/main" id="{8B102F8A-056D-430F-839C-9F98C14C7842}"/>
               </a:ext>
             </a:extLst>
           </p:cNvPr>
@@ -7110,7 +7110,7 @@
           <p:cNvPr id="7" name="">
             <a:extLst xmlns:a="http://schemas.openxmlformats.org/drawingml/2006/main">
               <a:ext uri="{FF2B5EF4-FFF2-40B4-BE49-F238E27FC236}">
-                <a16:creationId xmlns:a16="http://schemas.microsoft.com/office/drawing/2014/main" id="{FCDADB4F-E35C-4B18-AB91-3B6ADC6F32A9}"/>
+                <a16:creationId xmlns:a16="http://schemas.microsoft.com/office/drawing/2014/main" id="{95D2181D-AAB3-4015-A0FE-FCB4854C039B}"/>
               </a:ext>
             </a:extLst>
           </p:cNvPr>
@@ -7142,7 +7142,7 @@
           <p:cNvPr id="8" name="">
             <a:extLst xmlns:a="http://schemas.openxmlformats.org/drawingml/2006/main">
               <a:ext uri="{FF2B5EF4-FFF2-40B4-BE49-F238E27FC236}">
-                <a16:creationId xmlns:a16="http://schemas.microsoft.com/office/drawing/2014/main" id="{44782C85-7092-4AD8-A279-BC337C737A3D}"/>
+                <a16:creationId xmlns:a16="http://schemas.microsoft.com/office/drawing/2014/main" id="{B421271E-6DB4-4709-9861-F3A5F61BEADE}"/>
               </a:ext>
             </a:extLst>
           </p:cNvPr>
@@ -7199,7 +7199,7 @@
           <p:cNvPr id="9" name="">
             <a:extLst xmlns:a="http://schemas.openxmlformats.org/drawingml/2006/main">
               <a:ext uri="{FF2B5EF4-FFF2-40B4-BE49-F238E27FC236}">
-                <a16:creationId xmlns:a16="http://schemas.microsoft.com/office/drawing/2014/main" id="{D47AA77E-F560-4C89-8950-8312B2394B21}"/>
+                <a16:creationId xmlns:a16="http://schemas.microsoft.com/office/drawing/2014/main" id="{E47FBCAB-D884-48EA-B7CC-0F2824DEA469}"/>
               </a:ext>
             </a:extLst>
           </p:cNvPr>
@@ -7256,7 +7256,7 @@
           <p:cNvPr id="10" name="">
             <a:extLst xmlns:a="http://schemas.openxmlformats.org/drawingml/2006/main">
               <a:ext uri="{FF2B5EF4-FFF2-40B4-BE49-F238E27FC236}">
-                <a16:creationId xmlns:a16="http://schemas.microsoft.com/office/drawing/2014/main" id="{27F5742D-A28D-43EE-BA29-96DAA8DAC729}"/>
+                <a16:creationId xmlns:a16="http://schemas.microsoft.com/office/drawing/2014/main" id="{0B2C35E1-084E-4754-A234-AEF505415BCB}"/>
               </a:ext>
             </a:extLst>
           </p:cNvPr>
@@ -7313,7 +7313,7 @@
           <p:cNvPr id="11" name="">
             <a:extLst xmlns:a="http://schemas.openxmlformats.org/drawingml/2006/main">
               <a:ext uri="{FF2B5EF4-FFF2-40B4-BE49-F238E27FC236}">
-                <a16:creationId xmlns:a16="http://schemas.microsoft.com/office/drawing/2014/main" id="{E7AA952B-7435-4ED6-BD74-FAF4DD32E164}"/>
+                <a16:creationId xmlns:a16="http://schemas.microsoft.com/office/drawing/2014/main" id="{9C15F977-7AFD-4A71-B059-0809835A546B}"/>
               </a:ext>
             </a:extLst>
           </p:cNvPr>
@@ -7345,7 +7345,7 @@
           <p:cNvPr id="12" name="">
             <a:extLst xmlns:a="http://schemas.openxmlformats.org/drawingml/2006/main">
               <a:ext uri="{FF2B5EF4-FFF2-40B4-BE49-F238E27FC236}">
-                <a16:creationId xmlns:a16="http://schemas.microsoft.com/office/drawing/2014/main" id="{C8B065EC-9964-4158-BED6-2A40170A2056}"/>
+                <a16:creationId xmlns:a16="http://schemas.microsoft.com/office/drawing/2014/main" id="{3F1F9990-9F13-4AF0-99C7-0A7D079C4F12}"/>
               </a:ext>
             </a:extLst>
           </p:cNvPr>
@@ -7402,7 +7402,7 @@
           <p:cNvPr id="13" name="">
             <a:extLst xmlns:a="http://schemas.openxmlformats.org/drawingml/2006/main">
               <a:ext uri="{FF2B5EF4-FFF2-40B4-BE49-F238E27FC236}">
-                <a16:creationId xmlns:a16="http://schemas.microsoft.com/office/drawing/2014/main" id="{61818B28-0209-4A9F-ABBA-2EA070480715}"/>
+                <a16:creationId xmlns:a16="http://schemas.microsoft.com/office/drawing/2014/main" id="{62D66EE5-0BB5-4576-BE0D-8A748D4EB6BB}"/>
               </a:ext>
             </a:extLst>
           </p:cNvPr>
@@ -7459,7 +7459,7 @@
           <p:cNvPr id="14" name="">
             <a:extLst xmlns:a="http://schemas.openxmlformats.org/drawingml/2006/main">
               <a:ext uri="{FF2B5EF4-FFF2-40B4-BE49-F238E27FC236}">
-                <a16:creationId xmlns:a16="http://schemas.microsoft.com/office/drawing/2014/main" id="{67AB251E-5A71-4738-A0D3-D8B9D512ABD4}"/>
+                <a16:creationId xmlns:a16="http://schemas.microsoft.com/office/drawing/2014/main" id="{E405ACBB-6EC8-466B-993C-BC191D850E56}"/>
               </a:ext>
             </a:extLst>
           </p:cNvPr>
@@ -7516,7 +7516,7 @@
           <p:cNvPr id="15" name="">
             <a:extLst xmlns:a="http://schemas.openxmlformats.org/drawingml/2006/main">
               <a:ext uri="{FF2B5EF4-FFF2-40B4-BE49-F238E27FC236}">
-                <a16:creationId xmlns:a16="http://schemas.microsoft.com/office/drawing/2014/main" id="{5597F4CD-11A4-4FA6-AE5E-B676E11CF895}"/>
+                <a16:creationId xmlns:a16="http://schemas.microsoft.com/office/drawing/2014/main" id="{F739C3F7-0C56-4A69-BA93-3EA0E5824AAB}"/>
               </a:ext>
             </a:extLst>
           </p:cNvPr>
@@ -7571,7 +7571,7 @@
     </p:spTree>
     <p:extLst>
       <p:ext uri="{BB962C8B-B14F-4D97-AF65-F5344CB8AC3E}">
-        <p14:creationId xmlns:p14="http://schemas.microsoft.com/office/powerpoint/2010/main" val="116991253"/>
+        <p14:creationId xmlns:p14="http://schemas.microsoft.com/office/powerpoint/2010/main" val="1899546394"/>
       </p:ext>
     </p:extLst>
   </p:cSld>
@@ -7772,7 +7772,7 @@
           <p:cNvPr id="23" name="">
             <a:extLst xmlns:a="http://schemas.openxmlformats.org/drawingml/2006/main">
               <a:ext uri="{FF2B5EF4-FFF2-40B4-BE49-F238E27FC236}">
-                <a16:creationId xmlns:a16="http://schemas.microsoft.com/office/drawing/2014/main" id="{564B64DB-FEC7-4DC9-9242-BCCDCA909F46}"/>
+                <a16:creationId xmlns:a16="http://schemas.microsoft.com/office/drawing/2014/main" id="{63F2504F-47F3-4C98-AE63-4912F02DA2BC}"/>
               </a:ext>
             </a:extLst>
           </p:cNvPr>
@@ -7804,7 +7804,7 @@
           <p:cNvPr id="2" name="">
             <a:extLst xmlns:a="http://schemas.openxmlformats.org/drawingml/2006/main">
               <a:ext uri="{FF2B5EF4-FFF2-40B4-BE49-F238E27FC236}">
-                <a16:creationId xmlns:a16="http://schemas.microsoft.com/office/drawing/2014/main" id="{050D0D64-7F1D-4AC6-BA61-D3ECAD515B64}"/>
+                <a16:creationId xmlns:a16="http://schemas.microsoft.com/office/drawing/2014/main" id="{BA326731-00AC-4228-B387-D3512990C7E6}"/>
               </a:ext>
             </a:extLst>
           </p:cNvPr>
@@ -7861,7 +7861,7 @@
           <p:cNvPr id="3" name="">
             <a:extLst xmlns:a="http://schemas.openxmlformats.org/drawingml/2006/main">
               <a:ext uri="{FF2B5EF4-FFF2-40B4-BE49-F238E27FC236}">
-                <a16:creationId xmlns:a16="http://schemas.microsoft.com/office/drawing/2014/main" id="{BEBB83AD-9F9D-47FF-BDE0-AF3C2861A19C}"/>
+                <a16:creationId xmlns:a16="http://schemas.microsoft.com/office/drawing/2014/main" id="{DA26DEAE-B793-4331-988D-6FF63DAC6D9E}"/>
               </a:ext>
             </a:extLst>
           </p:cNvPr>
@@ -7893,7 +7893,7 @@
           <p:cNvPr id="4" name="">
             <a:extLst xmlns:a="http://schemas.openxmlformats.org/drawingml/2006/main">
               <a:ext uri="{FF2B5EF4-FFF2-40B4-BE49-F238E27FC236}">
-                <a16:creationId xmlns:a16="http://schemas.microsoft.com/office/drawing/2014/main" id="{936DB035-0719-4F54-8BFD-E7ACC49615DE}"/>
+                <a16:creationId xmlns:a16="http://schemas.microsoft.com/office/drawing/2014/main" id="{BFC6D649-FE73-4999-9C36-34FE53159610}"/>
               </a:ext>
             </a:extLst>
           </p:cNvPr>
@@ -7950,7 +7950,7 @@
           <p:cNvPr id="5" name="">
             <a:extLst xmlns:a="http://schemas.openxmlformats.org/drawingml/2006/main">
               <a:ext uri="{FF2B5EF4-FFF2-40B4-BE49-F238E27FC236}">
-                <a16:creationId xmlns:a16="http://schemas.microsoft.com/office/drawing/2014/main" id="{B0FC7F3D-7C61-4597-B999-79A0EF931A21}"/>
+                <a16:creationId xmlns:a16="http://schemas.microsoft.com/office/drawing/2014/main" id="{1BA677F2-F512-4FAF-ACAE-2212AF62A34E}"/>
               </a:ext>
             </a:extLst>
           </p:cNvPr>
@@ -8007,7 +8007,7 @@
           <p:cNvPr id="6" name="">
             <a:extLst xmlns:a="http://schemas.openxmlformats.org/drawingml/2006/main">
               <a:ext uri="{FF2B5EF4-FFF2-40B4-BE49-F238E27FC236}">
-                <a16:creationId xmlns:a16="http://schemas.microsoft.com/office/drawing/2014/main" id="{73B1F93C-D135-4829-A0E9-BE7820C7E86D}"/>
+                <a16:creationId xmlns:a16="http://schemas.microsoft.com/office/drawing/2014/main" id="{C35E386E-DF46-4703-9DA3-87D33F4ACA85}"/>
               </a:ext>
             </a:extLst>
           </p:cNvPr>
@@ -8064,7 +8064,7 @@
           <p:cNvPr id="7" name="">
             <a:extLst xmlns:a="http://schemas.openxmlformats.org/drawingml/2006/main">
               <a:ext uri="{FF2B5EF4-FFF2-40B4-BE49-F238E27FC236}">
-                <a16:creationId xmlns:a16="http://schemas.microsoft.com/office/drawing/2014/main" id="{7AA8369D-B17D-4985-8F80-15FD14C23FF4}"/>
+                <a16:creationId xmlns:a16="http://schemas.microsoft.com/office/drawing/2014/main" id="{F20C6075-3E0C-4A32-813E-A25911F122CF}"/>
               </a:ext>
             </a:extLst>
           </p:cNvPr>
@@ -8096,7 +8096,7 @@
           <p:cNvPr id="8" name="">
             <a:extLst xmlns:a="http://schemas.openxmlformats.org/drawingml/2006/main">
               <a:ext uri="{FF2B5EF4-FFF2-40B4-BE49-F238E27FC236}">
-                <a16:creationId xmlns:a16="http://schemas.microsoft.com/office/drawing/2014/main" id="{CF931B1B-A649-4787-9056-3E70CCCD0B1E}"/>
+                <a16:creationId xmlns:a16="http://schemas.microsoft.com/office/drawing/2014/main" id="{96901104-1A9E-4885-913A-55D7EA3FBF15}"/>
               </a:ext>
             </a:extLst>
           </p:cNvPr>
@@ -8153,7 +8153,7 @@
           <p:cNvPr id="9" name="">
             <a:extLst xmlns:a="http://schemas.openxmlformats.org/drawingml/2006/main">
               <a:ext uri="{FF2B5EF4-FFF2-40B4-BE49-F238E27FC236}">
-                <a16:creationId xmlns:a16="http://schemas.microsoft.com/office/drawing/2014/main" id="{BA682606-D4E0-406D-AD20-74D111A33040}"/>
+                <a16:creationId xmlns:a16="http://schemas.microsoft.com/office/drawing/2014/main" id="{EF1CCBB9-2D83-45DB-ABFC-053816D58BC0}"/>
               </a:ext>
             </a:extLst>
           </p:cNvPr>
@@ -8210,19 +8210,19 @@
           <p:cNvPr id="10" name="">
             <a:extLst xmlns:a="http://schemas.openxmlformats.org/drawingml/2006/main">
               <a:ext uri="{FF2B5EF4-FFF2-40B4-BE49-F238E27FC236}">
-                <a16:creationId xmlns:a16="http://schemas.microsoft.com/office/drawing/2014/main" id="{8A6FA147-DA34-4455-A9A6-A873B72009B9}"/>
-              </a:ext>
-            </a:extLst>
-          </p:cNvPr>
-          <p:cNvSpPr>
-            <a:spLocks xmlns:a="http://schemas.openxmlformats.org/drawingml/2006/main" noGrp="1"/>
-          </p:cNvSpPr>
-          <p:nvPr/>
-        </p:nvSpPr>
-        <p:spPr>
-          <a:xfrm xmlns:a="http://schemas.openxmlformats.org/drawingml/2006/main">
-            <a:off x="914400" y="1257300"/>
-            <a:ext cx="10363200" cy="781050"/>
+                <a16:creationId xmlns:a16="http://schemas.microsoft.com/office/drawing/2014/main" id="{AFA7D54A-F0D8-4916-B210-3ABA62EB1BAE}"/>
+              </a:ext>
+            </a:extLst>
+          </p:cNvPr>
+          <p:cNvSpPr>
+            <a:spLocks xmlns:a="http://schemas.openxmlformats.org/drawingml/2006/main" noGrp="1"/>
+          </p:cNvSpPr>
+          <p:nvPr/>
+        </p:nvSpPr>
+        <p:spPr>
+          <a:xfrm xmlns:a="http://schemas.openxmlformats.org/drawingml/2006/main">
+            <a:off x="857250" y="1219200"/>
+            <a:ext cx="10477500" cy="742950"/>
           </a:xfrm>
           <a:prstGeom xmlns:a="http://schemas.openxmlformats.org/drawingml/2006/main" prst="rect">
             <a:avLst/>
@@ -8239,7 +8239,7 @@
           <a:lstStyle xmlns:a="http://schemas.openxmlformats.org/drawingml/2006/main"/>
           <a:p xmlns:a="http://schemas.openxmlformats.org/drawingml/2006/main">
             <a:pPr algn="ctr">
-              <a:defRPr sz="2175" b="1">
+              <a:defRPr sz="2100" b="1">
                 <a:solidFill>
                   <a:srgbClr val="17253A"/>
                 </a:solidFill>
@@ -8249,7 +8249,7 @@
               </a:defRPr>
             </a:pPr>
             <a:r>
-              <a:rPr sz="2175" b="1">
+              <a:rPr sz="2100" b="1">
                 <a:solidFill>
                   <a:srgbClr val="17253A"/>
                 </a:solidFill>
@@ -8267,28 +8267,30 @@
           <p:cNvPr id="11" name="">
             <a:extLst xmlns:a="http://schemas.openxmlformats.org/drawingml/2006/main">
               <a:ext uri="{FF2B5EF4-FFF2-40B4-BE49-F238E27FC236}">
-                <a16:creationId xmlns:a16="http://schemas.microsoft.com/office/drawing/2014/main" id="{6645048D-5B1F-42F4-9A21-DB744708A0AA}"/>
-              </a:ext>
-            </a:extLst>
-          </p:cNvPr>
-          <p:cNvSpPr>
-            <a:spLocks xmlns:a="http://schemas.openxmlformats.org/drawingml/2006/main" noGrp="1"/>
-          </p:cNvSpPr>
-          <p:nvPr/>
-        </p:nvSpPr>
-        <p:spPr>
-          <a:xfrm xmlns:a="http://schemas.openxmlformats.org/drawingml/2006/main">
-            <a:off x="1000125" y="2247900"/>
-            <a:ext cx="476250" cy="476250"/>
-          </a:xfrm>
-          <a:prstGeom xmlns:a="http://schemas.openxmlformats.org/drawingml/2006/main" prst="ellipse">
+                <a16:creationId xmlns:a16="http://schemas.microsoft.com/office/drawing/2014/main" id="{85612B16-C609-442C-AB74-88B9638279EB}"/>
+              </a:ext>
+            </a:extLst>
+          </p:cNvPr>
+          <p:cNvSpPr>
+            <a:spLocks xmlns:a="http://schemas.openxmlformats.org/drawingml/2006/main" noGrp="1"/>
+          </p:cNvSpPr>
+          <p:nvPr/>
+        </p:nvSpPr>
+        <p:spPr>
+          <a:xfrm xmlns:a="http://schemas.openxmlformats.org/drawingml/2006/main">
+            <a:off x="971550" y="2124075"/>
+            <a:ext cx="38100" cy="3524250"/>
+          </a:xfrm>
+          <a:prstGeom xmlns:a="http://schemas.openxmlformats.org/drawingml/2006/main" prst="rect">
             <a:avLst/>
           </a:prstGeom>
           <a:solidFill xmlns:a="http://schemas.openxmlformats.org/drawingml/2006/main">
-            <a:srgbClr val="18324A"/>
+            <a:srgbClr val="2C6E73"/>
           </a:solidFill>
           <a:ln xmlns:a="http://schemas.openxmlformats.org/drawingml/2006/main" w="0">
-            <a:noFill/>
+            <a:solidFill>
+              <a:srgbClr val="2C6E73"/>
+            </a:solidFill>
           </a:ln>
         </p:spPr>
       </p:sp>
@@ -8297,19 +8299,19 @@
           <p:cNvPr id="12" name="">
             <a:extLst xmlns:a="http://schemas.openxmlformats.org/drawingml/2006/main">
               <a:ext uri="{FF2B5EF4-FFF2-40B4-BE49-F238E27FC236}">
-                <a16:creationId xmlns:a16="http://schemas.microsoft.com/office/drawing/2014/main" id="{94A802E2-7300-4711-BAE4-A63CF14D905E}"/>
-              </a:ext>
-            </a:extLst>
-          </p:cNvPr>
-          <p:cNvSpPr>
-            <a:spLocks xmlns:a="http://schemas.openxmlformats.org/drawingml/2006/main" noGrp="1"/>
-          </p:cNvSpPr>
-          <p:nvPr/>
-        </p:nvSpPr>
-        <p:spPr>
-          <a:xfrm xmlns:a="http://schemas.openxmlformats.org/drawingml/2006/main">
-            <a:off x="1000125" y="2276475"/>
-            <a:ext cx="476250" cy="419100"/>
+                <a16:creationId xmlns:a16="http://schemas.microsoft.com/office/drawing/2014/main" id="{3716DECB-0084-4A1E-85F7-7F18D85BB836}"/>
+              </a:ext>
+            </a:extLst>
+          </p:cNvPr>
+          <p:cNvSpPr>
+            <a:spLocks xmlns:a="http://schemas.openxmlformats.org/drawingml/2006/main" noGrp="1"/>
+          </p:cNvSpPr>
+          <p:nvPr/>
+        </p:nvSpPr>
+        <p:spPr>
+          <a:xfrm xmlns:a="http://schemas.openxmlformats.org/drawingml/2006/main">
+            <a:off x="1162050" y="2200275"/>
+            <a:ext cx="400050" cy="400050"/>
           </a:xfrm>
           <a:prstGeom xmlns:a="http://schemas.openxmlformats.org/drawingml/2006/main" prst="rect">
             <a:avLst/>
@@ -8326,9 +8328,9 @@
           <a:lstStyle xmlns:a="http://schemas.openxmlformats.org/drawingml/2006/main"/>
           <a:p xmlns:a="http://schemas.openxmlformats.org/drawingml/2006/main">
             <a:pPr algn="ctr">
-              <a:defRPr sz="1350" b="1">
-                <a:solidFill>
-                  <a:srgbClr val="FFFFFF"/>
+              <a:defRPr sz="1125" b="1">
+                <a:solidFill>
+                  <a:srgbClr val="2C6E73"/>
                 </a:solidFill>
                 <a:latin typeface="Arial"/>
                 <a:ea typeface="Arial"/>
@@ -8336,9 +8338,9 @@
               </a:defRPr>
             </a:pPr>
             <a:r>
-              <a:rPr sz="1350" b="1">
-                <a:solidFill>
-                  <a:srgbClr val="FFFFFF"/>
+              <a:rPr sz="1125" b="1">
+                <a:solidFill>
+                  <a:srgbClr val="2C6E73"/>
                 </a:solidFill>
                 <a:latin typeface="Arial"/>
                 <a:ea typeface="Arial"/>
@@ -8354,19 +8356,19 @@
           <p:cNvPr id="13" name="">
             <a:extLst xmlns:a="http://schemas.openxmlformats.org/drawingml/2006/main">
               <a:ext uri="{FF2B5EF4-FFF2-40B4-BE49-F238E27FC236}">
-                <a16:creationId xmlns:a16="http://schemas.microsoft.com/office/drawing/2014/main" id="{98012554-6182-46D4-B6CB-AA7019D9ABE6}"/>
-              </a:ext>
-            </a:extLst>
-          </p:cNvPr>
-          <p:cNvSpPr>
-            <a:spLocks xmlns:a="http://schemas.openxmlformats.org/drawingml/2006/main" noGrp="1"/>
-          </p:cNvSpPr>
-          <p:nvPr/>
-        </p:nvSpPr>
-        <p:spPr>
-          <a:xfrm xmlns:a="http://schemas.openxmlformats.org/drawingml/2006/main">
-            <a:off x="1714500" y="2181225"/>
-            <a:ext cx="9429750" cy="609600"/>
+                <a16:creationId xmlns:a16="http://schemas.microsoft.com/office/drawing/2014/main" id="{A282F943-F5A0-4698-A008-1C8528C6282A}"/>
+              </a:ext>
+            </a:extLst>
+          </p:cNvPr>
+          <p:cNvSpPr>
+            <a:spLocks xmlns:a="http://schemas.openxmlformats.org/drawingml/2006/main" noGrp="1"/>
+          </p:cNvSpPr>
+          <p:nvPr/>
+        </p:nvSpPr>
+        <p:spPr>
+          <a:xfrm xmlns:a="http://schemas.openxmlformats.org/drawingml/2006/main">
+            <a:off x="1714500" y="2114550"/>
+            <a:ext cx="9525000" cy="809625"/>
           </a:xfrm>
           <a:prstGeom xmlns:a="http://schemas.openxmlformats.org/drawingml/2006/main" prst="rect">
             <a:avLst/>
@@ -8383,7 +8385,7 @@
           <a:lstStyle xmlns:a="http://schemas.openxmlformats.org/drawingml/2006/main"/>
           <a:p xmlns:a="http://schemas.openxmlformats.org/drawingml/2006/main">
             <a:pPr algn="l">
-              <a:defRPr sz="1500" b="0">
+              <a:defRPr sz="1725" b="0">
                 <a:solidFill>
                   <a:srgbClr val="17253A"/>
                 </a:solidFill>
@@ -8393,7 +8395,7 @@
               </a:defRPr>
             </a:pPr>
             <a:r>
-              <a:rPr sz="1500" b="0">
+              <a:rPr sz="1725" b="0">
                 <a:solidFill>
                   <a:srgbClr val="17253A"/>
                 </a:solidFill>
@@ -8401,7 +8403,7 @@
                 <a:ea typeface="Arial"/>
                 <a:cs typeface="Arial"/>
               </a:rPr>
-              <a:t>Identify the structure: Identify useful common factors or a common denominator.</a:t>
+              <a:t>42/56</a:t>
             </a:r>
           </a:p>
         </p:txBody>
@@ -8411,28 +8413,30 @@
           <p:cNvPr id="14" name="">
             <a:extLst xmlns:a="http://schemas.openxmlformats.org/drawingml/2006/main">
               <a:ext uri="{FF2B5EF4-FFF2-40B4-BE49-F238E27FC236}">
-                <a16:creationId xmlns:a16="http://schemas.microsoft.com/office/drawing/2014/main" id="{6C7EA9FD-623A-4191-91BF-1AB2A1307BC1}"/>
-              </a:ext>
-            </a:extLst>
-          </p:cNvPr>
-          <p:cNvSpPr>
-            <a:spLocks xmlns:a="http://schemas.openxmlformats.org/drawingml/2006/main" noGrp="1"/>
-          </p:cNvSpPr>
-          <p:nvPr/>
-        </p:nvSpPr>
-        <p:spPr>
-          <a:xfrm xmlns:a="http://schemas.openxmlformats.org/drawingml/2006/main">
-            <a:off x="1000125" y="2990850"/>
-            <a:ext cx="476250" cy="476250"/>
-          </a:xfrm>
-          <a:prstGeom xmlns:a="http://schemas.openxmlformats.org/drawingml/2006/main" prst="ellipse">
+                <a16:creationId xmlns:a16="http://schemas.microsoft.com/office/drawing/2014/main" id="{5FCFE9E7-7811-4C96-AAEF-A3C5AADF4614}"/>
+              </a:ext>
+            </a:extLst>
+          </p:cNvPr>
+          <p:cNvSpPr>
+            <a:spLocks xmlns:a="http://schemas.openxmlformats.org/drawingml/2006/main" noGrp="1"/>
+          </p:cNvSpPr>
+          <p:nvPr/>
+        </p:nvSpPr>
+        <p:spPr>
+          <a:xfrm xmlns:a="http://schemas.openxmlformats.org/drawingml/2006/main">
+            <a:off x="1714500" y="2943225"/>
+            <a:ext cx="9334500" cy="9525"/>
+          </a:xfrm>
+          <a:prstGeom xmlns:a="http://schemas.openxmlformats.org/drawingml/2006/main" prst="rect">
             <a:avLst/>
           </a:prstGeom>
           <a:solidFill xmlns:a="http://schemas.openxmlformats.org/drawingml/2006/main">
-            <a:srgbClr val="2C6E73"/>
+            <a:srgbClr val="D9E0E6"/>
           </a:solidFill>
           <a:ln xmlns:a="http://schemas.openxmlformats.org/drawingml/2006/main" w="0">
-            <a:noFill/>
+            <a:solidFill>
+              <a:srgbClr val="D9E0E6"/>
+            </a:solidFill>
           </a:ln>
         </p:spPr>
       </p:sp>
@@ -8441,19 +8445,19 @@
           <p:cNvPr id="15" name="">
             <a:extLst xmlns:a="http://schemas.openxmlformats.org/drawingml/2006/main">
               <a:ext uri="{FF2B5EF4-FFF2-40B4-BE49-F238E27FC236}">
-                <a16:creationId xmlns:a16="http://schemas.microsoft.com/office/drawing/2014/main" id="{15FB92FA-98CA-4636-B710-0657A319D489}"/>
-              </a:ext>
-            </a:extLst>
-          </p:cNvPr>
-          <p:cNvSpPr>
-            <a:spLocks xmlns:a="http://schemas.openxmlformats.org/drawingml/2006/main" noGrp="1"/>
-          </p:cNvSpPr>
-          <p:nvPr/>
-        </p:nvSpPr>
-        <p:spPr>
-          <a:xfrm xmlns:a="http://schemas.openxmlformats.org/drawingml/2006/main">
-            <a:off x="1000125" y="3019425"/>
-            <a:ext cx="476250" cy="419100"/>
+                <a16:creationId xmlns:a16="http://schemas.microsoft.com/office/drawing/2014/main" id="{A1A3089F-6A11-41E2-9FF1-5E34A816862E}"/>
+              </a:ext>
+            </a:extLst>
+          </p:cNvPr>
+          <p:cNvSpPr>
+            <a:spLocks xmlns:a="http://schemas.openxmlformats.org/drawingml/2006/main" noGrp="1"/>
+          </p:cNvSpPr>
+          <p:nvPr/>
+        </p:nvSpPr>
+        <p:spPr>
+          <a:xfrm xmlns:a="http://schemas.openxmlformats.org/drawingml/2006/main">
+            <a:off x="1162050" y="3076575"/>
+            <a:ext cx="400050" cy="400050"/>
           </a:xfrm>
           <a:prstGeom xmlns:a="http://schemas.openxmlformats.org/drawingml/2006/main" prst="rect">
             <a:avLst/>
@@ -8470,9 +8474,9 @@
           <a:lstStyle xmlns:a="http://schemas.openxmlformats.org/drawingml/2006/main"/>
           <a:p xmlns:a="http://schemas.openxmlformats.org/drawingml/2006/main">
             <a:pPr algn="ctr">
-              <a:defRPr sz="1350" b="1">
-                <a:solidFill>
-                  <a:srgbClr val="FFFFFF"/>
+              <a:defRPr sz="1125" b="1">
+                <a:solidFill>
+                  <a:srgbClr val="2C6E73"/>
                 </a:solidFill>
                 <a:latin typeface="Arial"/>
                 <a:ea typeface="Arial"/>
@@ -8480,9 +8484,9 @@
               </a:defRPr>
             </a:pPr>
             <a:r>
-              <a:rPr sz="1350" b="1">
-                <a:solidFill>
-                  <a:srgbClr val="FFFFFF"/>
+              <a:rPr sz="1125" b="1">
+                <a:solidFill>
+                  <a:srgbClr val="2C6E73"/>
                 </a:solidFill>
                 <a:latin typeface="Arial"/>
                 <a:ea typeface="Arial"/>
@@ -8498,19 +8502,19 @@
           <p:cNvPr id="16" name="">
             <a:extLst xmlns:a="http://schemas.openxmlformats.org/drawingml/2006/main">
               <a:ext uri="{FF2B5EF4-FFF2-40B4-BE49-F238E27FC236}">
-                <a16:creationId xmlns:a16="http://schemas.microsoft.com/office/drawing/2014/main" id="{529E28B5-16DE-4FD4-AEB8-3F52AE9D7C8D}"/>
-              </a:ext>
-            </a:extLst>
-          </p:cNvPr>
-          <p:cNvSpPr>
-            <a:spLocks xmlns:a="http://schemas.openxmlformats.org/drawingml/2006/main" noGrp="1"/>
-          </p:cNvSpPr>
-          <p:nvPr/>
-        </p:nvSpPr>
-        <p:spPr>
-          <a:xfrm xmlns:a="http://schemas.openxmlformats.org/drawingml/2006/main">
-            <a:off x="1714500" y="2924175"/>
-            <a:ext cx="9429750" cy="609600"/>
+                <a16:creationId xmlns:a16="http://schemas.microsoft.com/office/drawing/2014/main" id="{A425D99F-172F-4457-B998-E31E51A32F56}"/>
+              </a:ext>
+            </a:extLst>
+          </p:cNvPr>
+          <p:cNvSpPr>
+            <a:spLocks xmlns:a="http://schemas.openxmlformats.org/drawingml/2006/main" noGrp="1"/>
+          </p:cNvSpPr>
+          <p:nvPr/>
+        </p:nvSpPr>
+        <p:spPr>
+          <a:xfrm xmlns:a="http://schemas.openxmlformats.org/drawingml/2006/main">
+            <a:off x="1714500" y="2990850"/>
+            <a:ext cx="9525000" cy="809625"/>
           </a:xfrm>
           <a:prstGeom xmlns:a="http://schemas.openxmlformats.org/drawingml/2006/main" prst="rect">
             <a:avLst/>
@@ -8527,7 +8531,7 @@
           <a:lstStyle xmlns:a="http://schemas.openxmlformats.org/drawingml/2006/main"/>
           <a:p xmlns:a="http://schemas.openxmlformats.org/drawingml/2006/main">
             <a:pPr algn="l">
-              <a:defRPr sz="1500" b="0">
+              <a:defRPr sz="1725" b="0">
                 <a:solidFill>
                   <a:srgbClr val="17253A"/>
                 </a:solidFill>
@@ -8537,7 +8541,7 @@
               </a:defRPr>
             </a:pPr>
             <a:r>
-              <a:rPr sz="1500" b="0">
+              <a:rPr sz="1725" b="0">
                 <a:solidFill>
                   <a:srgbClr val="17253A"/>
                 </a:solidFill>
@@ -8545,7 +8549,7 @@
                 <a:ea typeface="Arial"/>
                 <a:cs typeface="Arial"/>
               </a:rPr>
-              <a:t>Set up the method: Convert or simplify without changing the fraction's value.</a:t>
+              <a:t>HCF(42, 56) = 14</a:t>
             </a:r>
           </a:p>
         </p:txBody>
@@ -8555,28 +8559,30 @@
           <p:cNvPr id="17" name="">
             <a:extLst xmlns:a="http://schemas.openxmlformats.org/drawingml/2006/main">
               <a:ext uri="{FF2B5EF4-FFF2-40B4-BE49-F238E27FC236}">
-                <a16:creationId xmlns:a16="http://schemas.microsoft.com/office/drawing/2014/main" id="{205B65D2-9BE0-4AC8-8D96-06995E39FBC8}"/>
-              </a:ext>
-            </a:extLst>
-          </p:cNvPr>
-          <p:cNvSpPr>
-            <a:spLocks xmlns:a="http://schemas.openxmlformats.org/drawingml/2006/main" noGrp="1"/>
-          </p:cNvSpPr>
-          <p:nvPr/>
-        </p:nvSpPr>
-        <p:spPr>
-          <a:xfrm xmlns:a="http://schemas.openxmlformats.org/drawingml/2006/main">
-            <a:off x="1000125" y="3733800"/>
-            <a:ext cx="476250" cy="476250"/>
-          </a:xfrm>
-          <a:prstGeom xmlns:a="http://schemas.openxmlformats.org/drawingml/2006/main" prst="ellipse">
+                <a16:creationId xmlns:a16="http://schemas.microsoft.com/office/drawing/2014/main" id="{50E683D0-A56D-4440-8C4F-5D09A6B30222}"/>
+              </a:ext>
+            </a:extLst>
+          </p:cNvPr>
+          <p:cNvSpPr>
+            <a:spLocks xmlns:a="http://schemas.openxmlformats.org/drawingml/2006/main" noGrp="1"/>
+          </p:cNvSpPr>
+          <p:nvPr/>
+        </p:nvSpPr>
+        <p:spPr>
+          <a:xfrm xmlns:a="http://schemas.openxmlformats.org/drawingml/2006/main">
+            <a:off x="1714500" y="3819525"/>
+            <a:ext cx="9334500" cy="9525"/>
+          </a:xfrm>
+          <a:prstGeom xmlns:a="http://schemas.openxmlformats.org/drawingml/2006/main" prst="rect">
             <a:avLst/>
           </a:prstGeom>
           <a:solidFill xmlns:a="http://schemas.openxmlformats.org/drawingml/2006/main">
-            <a:srgbClr val="2C6E73"/>
+            <a:srgbClr val="D9E0E6"/>
           </a:solidFill>
           <a:ln xmlns:a="http://schemas.openxmlformats.org/drawingml/2006/main" w="0">
-            <a:noFill/>
+            <a:solidFill>
+              <a:srgbClr val="D9E0E6"/>
+            </a:solidFill>
           </a:ln>
         </p:spPr>
       </p:sp>
@@ -8585,19 +8591,19 @@
           <p:cNvPr id="18" name="">
             <a:extLst xmlns:a="http://schemas.openxmlformats.org/drawingml/2006/main">
               <a:ext uri="{FF2B5EF4-FFF2-40B4-BE49-F238E27FC236}">
-                <a16:creationId xmlns:a16="http://schemas.microsoft.com/office/drawing/2014/main" id="{EE6CD724-C0AD-4A07-96BE-D6ACEC9BA3C4}"/>
-              </a:ext>
-            </a:extLst>
-          </p:cNvPr>
-          <p:cNvSpPr>
-            <a:spLocks xmlns:a="http://schemas.openxmlformats.org/drawingml/2006/main" noGrp="1"/>
-          </p:cNvSpPr>
-          <p:nvPr/>
-        </p:nvSpPr>
-        <p:spPr>
-          <a:xfrm xmlns:a="http://schemas.openxmlformats.org/drawingml/2006/main">
-            <a:off x="1000125" y="3762375"/>
-            <a:ext cx="476250" cy="419100"/>
+                <a16:creationId xmlns:a16="http://schemas.microsoft.com/office/drawing/2014/main" id="{AFA169EE-35EF-435A-965E-64CBD28F7BAE}"/>
+              </a:ext>
+            </a:extLst>
+          </p:cNvPr>
+          <p:cNvSpPr>
+            <a:spLocks xmlns:a="http://schemas.openxmlformats.org/drawingml/2006/main" noGrp="1"/>
+          </p:cNvSpPr>
+          <p:nvPr/>
+        </p:nvSpPr>
+        <p:spPr>
+          <a:xfrm xmlns:a="http://schemas.openxmlformats.org/drawingml/2006/main">
+            <a:off x="1162050" y="3952875"/>
+            <a:ext cx="400050" cy="400050"/>
           </a:xfrm>
           <a:prstGeom xmlns:a="http://schemas.openxmlformats.org/drawingml/2006/main" prst="rect">
             <a:avLst/>
@@ -8614,9 +8620,9 @@
           <a:lstStyle xmlns:a="http://schemas.openxmlformats.org/drawingml/2006/main"/>
           <a:p xmlns:a="http://schemas.openxmlformats.org/drawingml/2006/main">
             <a:pPr algn="ctr">
-              <a:defRPr sz="1350" b="1">
-                <a:solidFill>
-                  <a:srgbClr val="FFFFFF"/>
+              <a:defRPr sz="1125" b="1">
+                <a:solidFill>
+                  <a:srgbClr val="2C6E73"/>
                 </a:solidFill>
                 <a:latin typeface="Arial"/>
                 <a:ea typeface="Arial"/>
@@ -8624,9 +8630,9 @@
               </a:defRPr>
             </a:pPr>
             <a:r>
-              <a:rPr sz="1350" b="1">
-                <a:solidFill>
-                  <a:srgbClr val="FFFFFF"/>
+              <a:rPr sz="1125" b="1">
+                <a:solidFill>
+                  <a:srgbClr val="2C6E73"/>
                 </a:solidFill>
                 <a:latin typeface="Arial"/>
                 <a:ea typeface="Arial"/>
@@ -8642,19 +8648,19 @@
           <p:cNvPr id="19" name="">
             <a:extLst xmlns:a="http://schemas.openxmlformats.org/drawingml/2006/main">
               <a:ext uri="{FF2B5EF4-FFF2-40B4-BE49-F238E27FC236}">
-                <a16:creationId xmlns:a16="http://schemas.microsoft.com/office/drawing/2014/main" id="{4197FDA7-0AE1-4170-A341-0E00D80798E8}"/>
-              </a:ext>
-            </a:extLst>
-          </p:cNvPr>
-          <p:cNvSpPr>
-            <a:spLocks xmlns:a="http://schemas.openxmlformats.org/drawingml/2006/main" noGrp="1"/>
-          </p:cNvSpPr>
-          <p:nvPr/>
-        </p:nvSpPr>
-        <p:spPr>
-          <a:xfrm xmlns:a="http://schemas.openxmlformats.org/drawingml/2006/main">
-            <a:off x="1714500" y="3667125"/>
-            <a:ext cx="9429750" cy="609600"/>
+                <a16:creationId xmlns:a16="http://schemas.microsoft.com/office/drawing/2014/main" id="{81C7F988-8B19-4398-B924-6E76646786F2}"/>
+              </a:ext>
+            </a:extLst>
+          </p:cNvPr>
+          <p:cNvSpPr>
+            <a:spLocks xmlns:a="http://schemas.openxmlformats.org/drawingml/2006/main" noGrp="1"/>
+          </p:cNvSpPr>
+          <p:nvPr/>
+        </p:nvSpPr>
+        <p:spPr>
+          <a:xfrm xmlns:a="http://schemas.openxmlformats.org/drawingml/2006/main">
+            <a:off x="1714500" y="3867150"/>
+            <a:ext cx="9525000" cy="809625"/>
           </a:xfrm>
           <a:prstGeom xmlns:a="http://schemas.openxmlformats.org/drawingml/2006/main" prst="rect">
             <a:avLst/>
@@ -8671,7 +8677,7 @@
           <a:lstStyle xmlns:a="http://schemas.openxmlformats.org/drawingml/2006/main"/>
           <a:p xmlns:a="http://schemas.openxmlformats.org/drawingml/2006/main">
             <a:pPr algn="l">
-              <a:defRPr sz="1500" b="0">
+              <a:defRPr sz="1725" b="0">
                 <a:solidFill>
                   <a:srgbClr val="17253A"/>
                 </a:solidFill>
@@ -8681,7 +8687,7 @@
               </a:defRPr>
             </a:pPr>
             <a:r>
-              <a:rPr sz="1500" b="0">
+              <a:rPr sz="1725" b="0">
                 <a:solidFill>
                   <a:srgbClr val="17253A"/>
                 </a:solidFill>
@@ -8689,7 +8695,7 @@
                 <a:ea typeface="Arial"/>
                 <a:cs typeface="Arial"/>
               </a:rPr>
-              <a:t>Complete the calculation: 3/4.</a:t>
+              <a:t>42 ÷ 14 = 3     56 ÷ 14 = 4</a:t>
             </a:r>
           </a:p>
         </p:txBody>
@@ -8699,28 +8705,30 @@
           <p:cNvPr id="20" name="">
             <a:extLst xmlns:a="http://schemas.openxmlformats.org/drawingml/2006/main">
               <a:ext uri="{FF2B5EF4-FFF2-40B4-BE49-F238E27FC236}">
-                <a16:creationId xmlns:a16="http://schemas.microsoft.com/office/drawing/2014/main" id="{851FE130-0632-43D7-B055-98BE0BE4EFDA}"/>
-              </a:ext>
-            </a:extLst>
-          </p:cNvPr>
-          <p:cNvSpPr>
-            <a:spLocks xmlns:a="http://schemas.openxmlformats.org/drawingml/2006/main" noGrp="1"/>
-          </p:cNvSpPr>
-          <p:nvPr/>
-        </p:nvSpPr>
-        <p:spPr>
-          <a:xfrm xmlns:a="http://schemas.openxmlformats.org/drawingml/2006/main">
-            <a:off x="1000125" y="4476750"/>
-            <a:ext cx="476250" cy="476250"/>
-          </a:xfrm>
-          <a:prstGeom xmlns:a="http://schemas.openxmlformats.org/drawingml/2006/main" prst="ellipse">
+                <a16:creationId xmlns:a16="http://schemas.microsoft.com/office/drawing/2014/main" id="{573BA3EC-068F-4FF2-AC15-69C1E8A6B0C2}"/>
+              </a:ext>
+            </a:extLst>
+          </p:cNvPr>
+          <p:cNvSpPr>
+            <a:spLocks xmlns:a="http://schemas.openxmlformats.org/drawingml/2006/main" noGrp="1"/>
+          </p:cNvSpPr>
+          <p:nvPr/>
+        </p:nvSpPr>
+        <p:spPr>
+          <a:xfrm xmlns:a="http://schemas.openxmlformats.org/drawingml/2006/main">
+            <a:off x="1714500" y="4695825"/>
+            <a:ext cx="9334500" cy="9525"/>
+          </a:xfrm>
+          <a:prstGeom xmlns:a="http://schemas.openxmlformats.org/drawingml/2006/main" prst="rect">
             <a:avLst/>
           </a:prstGeom>
           <a:solidFill xmlns:a="http://schemas.openxmlformats.org/drawingml/2006/main">
-            <a:srgbClr val="2C6E73"/>
+            <a:srgbClr val="D9E0E6"/>
           </a:solidFill>
           <a:ln xmlns:a="http://schemas.openxmlformats.org/drawingml/2006/main" w="0">
-            <a:noFill/>
+            <a:solidFill>
+              <a:srgbClr val="D9E0E6"/>
+            </a:solidFill>
           </a:ln>
         </p:spPr>
       </p:sp>
@@ -8729,19 +8737,19 @@
           <p:cNvPr id="21" name="">
             <a:extLst xmlns:a="http://schemas.openxmlformats.org/drawingml/2006/main">
               <a:ext uri="{FF2B5EF4-FFF2-40B4-BE49-F238E27FC236}">
-                <a16:creationId xmlns:a16="http://schemas.microsoft.com/office/drawing/2014/main" id="{31260630-C6D3-4D60-9D1B-98EB6668F4CB}"/>
-              </a:ext>
-            </a:extLst>
-          </p:cNvPr>
-          <p:cNvSpPr>
-            <a:spLocks xmlns:a="http://schemas.openxmlformats.org/drawingml/2006/main" noGrp="1"/>
-          </p:cNvSpPr>
-          <p:nvPr/>
-        </p:nvSpPr>
-        <p:spPr>
-          <a:xfrm xmlns:a="http://schemas.openxmlformats.org/drawingml/2006/main">
-            <a:off x="1000125" y="4505325"/>
-            <a:ext cx="476250" cy="419100"/>
+                <a16:creationId xmlns:a16="http://schemas.microsoft.com/office/drawing/2014/main" id="{9003AE78-45C2-4BF2-90B3-3149836D7D16}"/>
+              </a:ext>
+            </a:extLst>
+          </p:cNvPr>
+          <p:cNvSpPr>
+            <a:spLocks xmlns:a="http://schemas.openxmlformats.org/drawingml/2006/main" noGrp="1"/>
+          </p:cNvSpPr>
+          <p:nvPr/>
+        </p:nvSpPr>
+        <p:spPr>
+          <a:xfrm xmlns:a="http://schemas.openxmlformats.org/drawingml/2006/main">
+            <a:off x="1162050" y="4829175"/>
+            <a:ext cx="400050" cy="400050"/>
           </a:xfrm>
           <a:prstGeom xmlns:a="http://schemas.openxmlformats.org/drawingml/2006/main" prst="rect">
             <a:avLst/>
@@ -8758,9 +8766,9 @@
           <a:lstStyle xmlns:a="http://schemas.openxmlformats.org/drawingml/2006/main"/>
           <a:p xmlns:a="http://schemas.openxmlformats.org/drawingml/2006/main">
             <a:pPr algn="ctr">
-              <a:defRPr sz="1350" b="1">
-                <a:solidFill>
-                  <a:srgbClr val="FFFFFF"/>
+              <a:defRPr sz="1125" b="1">
+                <a:solidFill>
+                  <a:srgbClr val="2F785D"/>
                 </a:solidFill>
                 <a:latin typeface="Arial"/>
                 <a:ea typeface="Arial"/>
@@ -8768,9 +8776,9 @@
               </a:defRPr>
             </a:pPr>
             <a:r>
-              <a:rPr sz="1350" b="1">
-                <a:solidFill>
-                  <a:srgbClr val="FFFFFF"/>
+              <a:rPr sz="1125" b="1">
+                <a:solidFill>
+                  <a:srgbClr val="2F785D"/>
                 </a:solidFill>
                 <a:latin typeface="Arial"/>
                 <a:ea typeface="Arial"/>
@@ -8786,19 +8794,19 @@
           <p:cNvPr id="22" name="">
             <a:extLst xmlns:a="http://schemas.openxmlformats.org/drawingml/2006/main">
               <a:ext uri="{FF2B5EF4-FFF2-40B4-BE49-F238E27FC236}">
-                <a16:creationId xmlns:a16="http://schemas.microsoft.com/office/drawing/2014/main" id="{6C1AA7F6-163D-4AC9-BB20-B5139D78738F}"/>
-              </a:ext>
-            </a:extLst>
-          </p:cNvPr>
-          <p:cNvSpPr>
-            <a:spLocks xmlns:a="http://schemas.openxmlformats.org/drawingml/2006/main" noGrp="1"/>
-          </p:cNvSpPr>
-          <p:nvPr/>
-        </p:nvSpPr>
-        <p:spPr>
-          <a:xfrm xmlns:a="http://schemas.openxmlformats.org/drawingml/2006/main">
-            <a:off x="1714500" y="4410075"/>
-            <a:ext cx="9429750" cy="609600"/>
+                <a16:creationId xmlns:a16="http://schemas.microsoft.com/office/drawing/2014/main" id="{FB351B2D-A8BF-4EA8-ACE6-6ED4EC86F9F9}"/>
+              </a:ext>
+            </a:extLst>
+          </p:cNvPr>
+          <p:cNvSpPr>
+            <a:spLocks xmlns:a="http://schemas.openxmlformats.org/drawingml/2006/main" noGrp="1"/>
+          </p:cNvSpPr>
+          <p:nvPr/>
+        </p:nvSpPr>
+        <p:spPr>
+          <a:xfrm xmlns:a="http://schemas.openxmlformats.org/drawingml/2006/main">
+            <a:off x="1714500" y="4743450"/>
+            <a:ext cx="9525000" cy="809625"/>
           </a:xfrm>
           <a:prstGeom xmlns:a="http://schemas.openxmlformats.org/drawingml/2006/main" prst="rect">
             <a:avLst/>
@@ -8815,7 +8823,7 @@
           <a:lstStyle xmlns:a="http://schemas.openxmlformats.org/drawingml/2006/main"/>
           <a:p xmlns:a="http://schemas.openxmlformats.org/drawingml/2006/main">
             <a:pPr algn="l">
-              <a:defRPr sz="1500" b="1">
+              <a:defRPr sz="1725" b="1">
                 <a:solidFill>
                   <a:srgbClr val="2F785D"/>
                 </a:solidFill>
@@ -8825,7 +8833,7 @@
               </a:defRPr>
             </a:pPr>
             <a:r>
-              <a:rPr sz="1500" b="1">
+              <a:rPr sz="1725" b="1">
                 <a:solidFill>
                   <a:srgbClr val="2F785D"/>
                 </a:solidFill>
@@ -8833,7 +8841,7 @@
                 <a:ea typeface="Arial"/>
                 <a:cs typeface="Arial"/>
               </a:rPr>
-              <a:t>Check the result: Compare the new forms and justify the conclusion.</a:t>
+              <a:t>42/56 = 3/4</a:t>
             </a:r>
           </a:p>
         </p:txBody>
@@ -8841,7 +8849,7 @@
     </p:spTree>
     <p:extLst>
       <p:ext uri="{BB962C8B-B14F-4D97-AF65-F5344CB8AC3E}">
-        <p14:creationId xmlns:p14="http://schemas.microsoft.com/office/powerpoint/2010/main" val="651686083"/>
+        <p14:creationId xmlns:p14="http://schemas.microsoft.com/office/powerpoint/2010/main" val="523806895"/>
       </p:ext>
     </p:extLst>
   </p:cSld>
@@ -9134,7 +9142,7 @@
           <p:cNvPr id="15" name="">
             <a:extLst xmlns:a="http://schemas.openxmlformats.org/drawingml/2006/main">
               <a:ext uri="{FF2B5EF4-FFF2-40B4-BE49-F238E27FC236}">
-                <a16:creationId xmlns:a16="http://schemas.microsoft.com/office/drawing/2014/main" id="{926BCD49-582F-4342-B2CB-081D71D3687E}"/>
+                <a16:creationId xmlns:a16="http://schemas.microsoft.com/office/drawing/2014/main" id="{CCFFB4DE-5F22-461E-A122-B8D9B0E0936A}"/>
               </a:ext>
             </a:extLst>
           </p:cNvPr>
@@ -9166,7 +9174,7 @@
           <p:cNvPr id="2" name="">
             <a:extLst xmlns:a="http://schemas.openxmlformats.org/drawingml/2006/main">
               <a:ext uri="{FF2B5EF4-FFF2-40B4-BE49-F238E27FC236}">
-                <a16:creationId xmlns:a16="http://schemas.microsoft.com/office/drawing/2014/main" id="{9DC5DE06-FC95-4938-939F-99C5D63622FE}"/>
+                <a16:creationId xmlns:a16="http://schemas.microsoft.com/office/drawing/2014/main" id="{9C70379D-1061-4712-990B-5F431EE6DDDE}"/>
               </a:ext>
             </a:extLst>
           </p:cNvPr>
@@ -9223,7 +9231,7 @@
           <p:cNvPr id="3" name="">
             <a:extLst xmlns:a="http://schemas.openxmlformats.org/drawingml/2006/main">
               <a:ext uri="{FF2B5EF4-FFF2-40B4-BE49-F238E27FC236}">
-                <a16:creationId xmlns:a16="http://schemas.microsoft.com/office/drawing/2014/main" id="{D89692C1-ECBD-46F4-BF63-C6B3F8FE02CB}"/>
+                <a16:creationId xmlns:a16="http://schemas.microsoft.com/office/drawing/2014/main" id="{26ACBA71-51D2-4990-AC12-34C20DE83A93}"/>
               </a:ext>
             </a:extLst>
           </p:cNvPr>
@@ -9255,7 +9263,7 @@
           <p:cNvPr id="4" name="">
             <a:extLst xmlns:a="http://schemas.openxmlformats.org/drawingml/2006/main">
               <a:ext uri="{FF2B5EF4-FFF2-40B4-BE49-F238E27FC236}">
-                <a16:creationId xmlns:a16="http://schemas.microsoft.com/office/drawing/2014/main" id="{BDF37D68-76A6-4D55-BCEA-768DEF91F0B4}"/>
+                <a16:creationId xmlns:a16="http://schemas.microsoft.com/office/drawing/2014/main" id="{81BC6681-FF83-44AA-9844-E16A64F249C6}"/>
               </a:ext>
             </a:extLst>
           </p:cNvPr>
@@ -9312,7 +9320,7 @@
           <p:cNvPr id="5" name="">
             <a:extLst xmlns:a="http://schemas.openxmlformats.org/drawingml/2006/main">
               <a:ext uri="{FF2B5EF4-FFF2-40B4-BE49-F238E27FC236}">
-                <a16:creationId xmlns:a16="http://schemas.microsoft.com/office/drawing/2014/main" id="{9AB1732E-E055-4FBF-89ED-AE0F9092C930}"/>
+                <a16:creationId xmlns:a16="http://schemas.microsoft.com/office/drawing/2014/main" id="{C088B79C-D7A5-4768-8A45-05B0C7F9F5D5}"/>
               </a:ext>
             </a:extLst>
           </p:cNvPr>
@@ -9369,7 +9377,7 @@
           <p:cNvPr id="6" name="">
             <a:extLst xmlns:a="http://schemas.openxmlformats.org/drawingml/2006/main">
               <a:ext uri="{FF2B5EF4-FFF2-40B4-BE49-F238E27FC236}">
-                <a16:creationId xmlns:a16="http://schemas.microsoft.com/office/drawing/2014/main" id="{A6C22232-7BF5-4487-A6A8-A3ABFAE02A97}"/>
+                <a16:creationId xmlns:a16="http://schemas.microsoft.com/office/drawing/2014/main" id="{D18D66B7-BA0F-41A6-9056-667BD10614D1}"/>
               </a:ext>
             </a:extLst>
           </p:cNvPr>
@@ -9426,7 +9434,7 @@
           <p:cNvPr id="7" name="">
             <a:extLst xmlns:a="http://schemas.openxmlformats.org/drawingml/2006/main">
               <a:ext uri="{FF2B5EF4-FFF2-40B4-BE49-F238E27FC236}">
-                <a16:creationId xmlns:a16="http://schemas.microsoft.com/office/drawing/2014/main" id="{F9FC4A34-28E9-4C58-9C7B-0F7B306E23D8}"/>
+                <a16:creationId xmlns:a16="http://schemas.microsoft.com/office/drawing/2014/main" id="{106F6455-64A3-41D8-8772-230EA6883800}"/>
               </a:ext>
             </a:extLst>
           </p:cNvPr>
@@ -9458,7 +9466,7 @@
           <p:cNvPr id="8" name="">
             <a:extLst xmlns:a="http://schemas.openxmlformats.org/drawingml/2006/main">
               <a:ext uri="{FF2B5EF4-FFF2-40B4-BE49-F238E27FC236}">
-                <a16:creationId xmlns:a16="http://schemas.microsoft.com/office/drawing/2014/main" id="{117ACECC-3805-466E-96A2-7A58F442EE94}"/>
+                <a16:creationId xmlns:a16="http://schemas.microsoft.com/office/drawing/2014/main" id="{91AEC912-1AAF-4880-B57B-B1B30D5A63FC}"/>
               </a:ext>
             </a:extLst>
           </p:cNvPr>
@@ -9515,7 +9523,7 @@
           <p:cNvPr id="9" name="">
             <a:extLst xmlns:a="http://schemas.openxmlformats.org/drawingml/2006/main">
               <a:ext uri="{FF2B5EF4-FFF2-40B4-BE49-F238E27FC236}">
-                <a16:creationId xmlns:a16="http://schemas.microsoft.com/office/drawing/2014/main" id="{3D867AF8-7FB7-431F-A363-5D2252626632}"/>
+                <a16:creationId xmlns:a16="http://schemas.microsoft.com/office/drawing/2014/main" id="{A8744527-F9FF-4AB2-B680-6C6010BF8A9A}"/>
               </a:ext>
             </a:extLst>
           </p:cNvPr>
@@ -9572,7 +9580,7 @@
           <p:cNvPr id="10" name="">
             <a:extLst xmlns:a="http://schemas.openxmlformats.org/drawingml/2006/main">
               <a:ext uri="{FF2B5EF4-FFF2-40B4-BE49-F238E27FC236}">
-                <a16:creationId xmlns:a16="http://schemas.microsoft.com/office/drawing/2014/main" id="{E4B55F6C-3592-4A1E-A480-D0AE576FC0A8}"/>
+                <a16:creationId xmlns:a16="http://schemas.microsoft.com/office/drawing/2014/main" id="{DD2E9562-B0D8-4E8D-8D5A-47DAFFD9FA0D}"/>
               </a:ext>
             </a:extLst>
           </p:cNvPr>
@@ -9629,7 +9637,7 @@
           <p:cNvPr id="11" name="">
             <a:extLst xmlns:a="http://schemas.openxmlformats.org/drawingml/2006/main">
               <a:ext uri="{FF2B5EF4-FFF2-40B4-BE49-F238E27FC236}">
-                <a16:creationId xmlns:a16="http://schemas.microsoft.com/office/drawing/2014/main" id="{1FAA9D1F-9195-4330-842B-7EE9CF5CD44F}"/>
+                <a16:creationId xmlns:a16="http://schemas.microsoft.com/office/drawing/2014/main" id="{51608E6A-98FB-48FF-A7D4-6343489DBD89}"/>
               </a:ext>
             </a:extLst>
           </p:cNvPr>
@@ -9686,7 +9694,7 @@
           <p:cNvPr id="12" name="">
             <a:extLst xmlns:a="http://schemas.openxmlformats.org/drawingml/2006/main">
               <a:ext uri="{FF2B5EF4-FFF2-40B4-BE49-F238E27FC236}">
-                <a16:creationId xmlns:a16="http://schemas.microsoft.com/office/drawing/2014/main" id="{2AD9EE34-3CAF-4AF9-938E-0037EA7FBA90}"/>
+                <a16:creationId xmlns:a16="http://schemas.microsoft.com/office/drawing/2014/main" id="{C567E98A-C343-4783-8989-C8F3CC91EBD8}"/>
               </a:ext>
             </a:extLst>
           </p:cNvPr>
@@ -9718,7 +9726,7 @@
           <p:cNvPr id="13" name="">
             <a:extLst xmlns:a="http://schemas.openxmlformats.org/drawingml/2006/main">
               <a:ext uri="{FF2B5EF4-FFF2-40B4-BE49-F238E27FC236}">
-                <a16:creationId xmlns:a16="http://schemas.microsoft.com/office/drawing/2014/main" id="{15B1335D-AB5A-4E90-94EF-0C7C634F33F6}"/>
+                <a16:creationId xmlns:a16="http://schemas.microsoft.com/office/drawing/2014/main" id="{DB9976A6-7FC3-4DC4-8CBE-49653D1335CA}"/>
               </a:ext>
             </a:extLst>
           </p:cNvPr>
@@ -9775,7 +9783,7 @@
           <p:cNvPr id="14" name="">
             <a:extLst xmlns:a="http://schemas.openxmlformats.org/drawingml/2006/main">
               <a:ext uri="{FF2B5EF4-FFF2-40B4-BE49-F238E27FC236}">
-                <a16:creationId xmlns:a16="http://schemas.microsoft.com/office/drawing/2014/main" id="{D3F583F7-3CD4-4C51-ACCC-3D04994AD5DF}"/>
+                <a16:creationId xmlns:a16="http://schemas.microsoft.com/office/drawing/2014/main" id="{CBF2CD42-0DC8-457D-899A-E92FA5ADEB8D}"/>
               </a:ext>
             </a:extLst>
           </p:cNvPr>
@@ -9830,7 +9838,7 @@
     </p:spTree>
     <p:extLst>
       <p:ext uri="{BB962C8B-B14F-4D97-AF65-F5344CB8AC3E}">
-        <p14:creationId xmlns:p14="http://schemas.microsoft.com/office/powerpoint/2010/main" val="529370244"/>
+        <p14:creationId xmlns:p14="http://schemas.microsoft.com/office/powerpoint/2010/main" val="1560137648"/>
       </p:ext>
     </p:extLst>
   </p:cSld>
@@ -10031,7 +10039,7 @@
           <p:cNvPr id="16" name="">
             <a:extLst xmlns:a="http://schemas.openxmlformats.org/drawingml/2006/main">
               <a:ext uri="{FF2B5EF4-FFF2-40B4-BE49-F238E27FC236}">
-                <a16:creationId xmlns:a16="http://schemas.microsoft.com/office/drawing/2014/main" id="{9212EC42-8FD0-4149-B2B7-EA9118C581C2}"/>
+                <a16:creationId xmlns:a16="http://schemas.microsoft.com/office/drawing/2014/main" id="{C03A79CA-8D4F-4CE4-878F-119DCEA4CCFE}"/>
               </a:ext>
             </a:extLst>
           </p:cNvPr>
@@ -10063,7 +10071,7 @@
           <p:cNvPr id="2" name="">
             <a:extLst xmlns:a="http://schemas.openxmlformats.org/drawingml/2006/main">
               <a:ext uri="{FF2B5EF4-FFF2-40B4-BE49-F238E27FC236}">
-                <a16:creationId xmlns:a16="http://schemas.microsoft.com/office/drawing/2014/main" id="{E3C7ED28-75A0-42C1-8719-DB2608E24CFD}"/>
+                <a16:creationId xmlns:a16="http://schemas.microsoft.com/office/drawing/2014/main" id="{D27D2E49-AD18-46C4-B367-C9DA129EC52D}"/>
               </a:ext>
             </a:extLst>
           </p:cNvPr>
@@ -10120,7 +10128,7 @@
           <p:cNvPr id="3" name="">
             <a:extLst xmlns:a="http://schemas.openxmlformats.org/drawingml/2006/main">
               <a:ext uri="{FF2B5EF4-FFF2-40B4-BE49-F238E27FC236}">
-                <a16:creationId xmlns:a16="http://schemas.microsoft.com/office/drawing/2014/main" id="{509C49FE-0974-4E03-BE21-FC24992460B3}"/>
+                <a16:creationId xmlns:a16="http://schemas.microsoft.com/office/drawing/2014/main" id="{E9F52A46-9A39-4585-9A7D-5292CCD13D33}"/>
               </a:ext>
             </a:extLst>
           </p:cNvPr>
@@ -10152,7 +10160,7 @@
           <p:cNvPr id="4" name="">
             <a:extLst xmlns:a="http://schemas.openxmlformats.org/drawingml/2006/main">
               <a:ext uri="{FF2B5EF4-FFF2-40B4-BE49-F238E27FC236}">
-                <a16:creationId xmlns:a16="http://schemas.microsoft.com/office/drawing/2014/main" id="{3587ADE8-068C-4379-9B65-E58E66425EA3}"/>
+                <a16:creationId xmlns:a16="http://schemas.microsoft.com/office/drawing/2014/main" id="{805C171B-E612-453D-8BF4-007736983339}"/>
               </a:ext>
             </a:extLst>
           </p:cNvPr>
@@ -10209,7 +10217,7 @@
           <p:cNvPr id="5" name="">
             <a:extLst xmlns:a="http://schemas.openxmlformats.org/drawingml/2006/main">
               <a:ext uri="{FF2B5EF4-FFF2-40B4-BE49-F238E27FC236}">
-                <a16:creationId xmlns:a16="http://schemas.microsoft.com/office/drawing/2014/main" id="{AA740771-2717-43FD-8B7D-7CD540AF95E6}"/>
+                <a16:creationId xmlns:a16="http://schemas.microsoft.com/office/drawing/2014/main" id="{431AB9BC-88F4-4F65-9C14-A8CD2221E25E}"/>
               </a:ext>
             </a:extLst>
           </p:cNvPr>
@@ -10266,7 +10274,7 @@
           <p:cNvPr id="6" name="">
             <a:extLst xmlns:a="http://schemas.openxmlformats.org/drawingml/2006/main">
               <a:ext uri="{FF2B5EF4-FFF2-40B4-BE49-F238E27FC236}">
-                <a16:creationId xmlns:a16="http://schemas.microsoft.com/office/drawing/2014/main" id="{E2945986-A789-4333-8F64-3B30E0F711D3}"/>
+                <a16:creationId xmlns:a16="http://schemas.microsoft.com/office/drawing/2014/main" id="{419233F0-A963-48E6-B710-6D6A6A832E7B}"/>
               </a:ext>
             </a:extLst>
           </p:cNvPr>
@@ -10323,7 +10331,7 @@
           <p:cNvPr id="7" name="">
             <a:extLst xmlns:a="http://schemas.openxmlformats.org/drawingml/2006/main">
               <a:ext uri="{FF2B5EF4-FFF2-40B4-BE49-F238E27FC236}">
-                <a16:creationId xmlns:a16="http://schemas.microsoft.com/office/drawing/2014/main" id="{E592CD8B-E5A8-4253-8F31-F5FC38AB24AF}"/>
+                <a16:creationId xmlns:a16="http://schemas.microsoft.com/office/drawing/2014/main" id="{E2EF9430-3213-4BAD-B290-C99BC6C1780D}"/>
               </a:ext>
             </a:extLst>
           </p:cNvPr>
@@ -10355,7 +10363,7 @@
           <p:cNvPr id="8" name="">
             <a:extLst xmlns:a="http://schemas.openxmlformats.org/drawingml/2006/main">
               <a:ext uri="{FF2B5EF4-FFF2-40B4-BE49-F238E27FC236}">
-                <a16:creationId xmlns:a16="http://schemas.microsoft.com/office/drawing/2014/main" id="{BB092325-DAFB-4849-B113-98716FFB5897}"/>
+                <a16:creationId xmlns:a16="http://schemas.microsoft.com/office/drawing/2014/main" id="{DC2B81F7-1059-4248-9D5A-0528C7BAA66B}"/>
               </a:ext>
             </a:extLst>
           </p:cNvPr>
@@ -10412,7 +10420,7 @@
           <p:cNvPr id="9" name="">
             <a:extLst xmlns:a="http://schemas.openxmlformats.org/drawingml/2006/main">
               <a:ext uri="{FF2B5EF4-FFF2-40B4-BE49-F238E27FC236}">
-                <a16:creationId xmlns:a16="http://schemas.microsoft.com/office/drawing/2014/main" id="{0A61B6DD-6CDD-455C-B4B8-AD5A829F3206}"/>
+                <a16:creationId xmlns:a16="http://schemas.microsoft.com/office/drawing/2014/main" id="{AECA1419-70E4-4699-BC01-5280B7FF8684}"/>
               </a:ext>
             </a:extLst>
           </p:cNvPr>
@@ -10469,7 +10477,7 @@
           <p:cNvPr id="10" name="">
             <a:extLst xmlns:a="http://schemas.openxmlformats.org/drawingml/2006/main">
               <a:ext uri="{FF2B5EF4-FFF2-40B4-BE49-F238E27FC236}">
-                <a16:creationId xmlns:a16="http://schemas.microsoft.com/office/drawing/2014/main" id="{2A860151-E4B2-4F55-9E0C-65C2BD01EAC6}"/>
+                <a16:creationId xmlns:a16="http://schemas.microsoft.com/office/drawing/2014/main" id="{56D416F3-371A-4E10-AAFA-C80B2794C798}"/>
               </a:ext>
             </a:extLst>
           </p:cNvPr>
@@ -10526,7 +10534,7 @@
           <p:cNvPr id="11" name="">
             <a:extLst xmlns:a="http://schemas.openxmlformats.org/drawingml/2006/main">
               <a:ext uri="{FF2B5EF4-FFF2-40B4-BE49-F238E27FC236}">
-                <a16:creationId xmlns:a16="http://schemas.microsoft.com/office/drawing/2014/main" id="{4055D138-8385-48E7-BF28-1CC192862F3F}"/>
+                <a16:creationId xmlns:a16="http://schemas.microsoft.com/office/drawing/2014/main" id="{6E4E2501-B5E4-4C2C-B8ED-5FF5A91769A2}"/>
               </a:ext>
             </a:extLst>
           </p:cNvPr>
@@ -10583,7 +10591,7 @@
           <p:cNvPr id="12" name="">
             <a:extLst xmlns:a="http://schemas.openxmlformats.org/drawingml/2006/main">
               <a:ext uri="{FF2B5EF4-FFF2-40B4-BE49-F238E27FC236}">
-                <a16:creationId xmlns:a16="http://schemas.microsoft.com/office/drawing/2014/main" id="{603C1D97-2768-4783-8F0D-21DA27E67B50}"/>
+                <a16:creationId xmlns:a16="http://schemas.microsoft.com/office/drawing/2014/main" id="{CFD039C8-2E41-4792-A6A8-081D89639D4F}"/>
               </a:ext>
             </a:extLst>
           </p:cNvPr>
@@ -10640,7 +10648,7 @@
           <p:cNvPr id="13" name="">
             <a:extLst xmlns:a="http://schemas.openxmlformats.org/drawingml/2006/main">
               <a:ext uri="{FF2B5EF4-FFF2-40B4-BE49-F238E27FC236}">
-                <a16:creationId xmlns:a16="http://schemas.microsoft.com/office/drawing/2014/main" id="{BE470E28-499D-4A35-B8B4-44F92C20831D}"/>
+                <a16:creationId xmlns:a16="http://schemas.microsoft.com/office/drawing/2014/main" id="{B8E1329E-E023-4655-A76E-AE7062238722}"/>
               </a:ext>
             </a:extLst>
           </p:cNvPr>
@@ -10697,7 +10705,7 @@
           <p:cNvPr id="14" name="">
             <a:extLst xmlns:a="http://schemas.openxmlformats.org/drawingml/2006/main">
               <a:ext uri="{FF2B5EF4-FFF2-40B4-BE49-F238E27FC236}">
-                <a16:creationId xmlns:a16="http://schemas.microsoft.com/office/drawing/2014/main" id="{F2D4EA5E-D5EE-48F3-9970-62A880278F62}"/>
+                <a16:creationId xmlns:a16="http://schemas.microsoft.com/office/drawing/2014/main" id="{8FE092E7-301A-48FF-B422-329957AB7393}"/>
               </a:ext>
             </a:extLst>
           </p:cNvPr>
@@ -10754,7 +10762,7 @@
           <p:cNvPr id="15" name="">
             <a:extLst xmlns:a="http://schemas.openxmlformats.org/drawingml/2006/main">
               <a:ext uri="{FF2B5EF4-FFF2-40B4-BE49-F238E27FC236}">
-                <a16:creationId xmlns:a16="http://schemas.microsoft.com/office/drawing/2014/main" id="{99656A5B-AB48-495C-B6BA-20F2399F5907}"/>
+                <a16:creationId xmlns:a16="http://schemas.microsoft.com/office/drawing/2014/main" id="{9FA1F32B-BF32-4956-A300-2BC16A9F9478}"/>
               </a:ext>
             </a:extLst>
           </p:cNvPr>
@@ -10809,7 +10817,7 @@
     </p:spTree>
     <p:extLst>
       <p:ext uri="{BB962C8B-B14F-4D97-AF65-F5344CB8AC3E}">
-        <p14:creationId xmlns:p14="http://schemas.microsoft.com/office/powerpoint/2010/main" val="167426913"/>
+        <p14:creationId xmlns:p14="http://schemas.microsoft.com/office/powerpoint/2010/main" val="1140840703"/>
       </p:ext>
     </p:extLst>
   </p:cSld>
@@ -10964,7 +10972,7 @@
           <p:cNvPr id="16" name="">
             <a:extLst xmlns:a="http://schemas.openxmlformats.org/drawingml/2006/main">
               <a:ext uri="{FF2B5EF4-FFF2-40B4-BE49-F238E27FC236}">
-                <a16:creationId xmlns:a16="http://schemas.microsoft.com/office/drawing/2014/main" id="{52026C27-91DF-4A53-9469-5646C2FD6BEF}"/>
+                <a16:creationId xmlns:a16="http://schemas.microsoft.com/office/drawing/2014/main" id="{3C822EBD-B743-4437-B134-2039BE41D28D}"/>
               </a:ext>
             </a:extLst>
           </p:cNvPr>
@@ -10996,7 +11004,7 @@
           <p:cNvPr id="2" name="">
             <a:extLst xmlns:a="http://schemas.openxmlformats.org/drawingml/2006/main">
               <a:ext uri="{FF2B5EF4-FFF2-40B4-BE49-F238E27FC236}">
-                <a16:creationId xmlns:a16="http://schemas.microsoft.com/office/drawing/2014/main" id="{E2509276-7967-4327-857E-97A605B25986}"/>
+                <a16:creationId xmlns:a16="http://schemas.microsoft.com/office/drawing/2014/main" id="{99FB1CFB-B6DF-4248-9C54-7EAE9B3DE7D5}"/>
               </a:ext>
             </a:extLst>
           </p:cNvPr>
@@ -11053,7 +11061,7 @@
           <p:cNvPr id="3" name="">
             <a:extLst xmlns:a="http://schemas.openxmlformats.org/drawingml/2006/main">
               <a:ext uri="{FF2B5EF4-FFF2-40B4-BE49-F238E27FC236}">
-                <a16:creationId xmlns:a16="http://schemas.microsoft.com/office/drawing/2014/main" id="{C4334B7E-477B-43C2-BEAE-F788473CB95B}"/>
+                <a16:creationId xmlns:a16="http://schemas.microsoft.com/office/drawing/2014/main" id="{4B2AED1F-D2F3-4399-85DD-298D56C2BE6B}"/>
               </a:ext>
             </a:extLst>
           </p:cNvPr>
@@ -11085,7 +11093,7 @@
           <p:cNvPr id="4" name="">
             <a:extLst xmlns:a="http://schemas.openxmlformats.org/drawingml/2006/main">
               <a:ext uri="{FF2B5EF4-FFF2-40B4-BE49-F238E27FC236}">
-                <a16:creationId xmlns:a16="http://schemas.microsoft.com/office/drawing/2014/main" id="{47547347-F2E1-445C-8740-797E8F10E53B}"/>
+                <a16:creationId xmlns:a16="http://schemas.microsoft.com/office/drawing/2014/main" id="{B6681E9F-F5DE-4470-81A9-F670422DC4ED}"/>
               </a:ext>
             </a:extLst>
           </p:cNvPr>
@@ -11142,7 +11150,7 @@
           <p:cNvPr id="5" name="">
             <a:extLst xmlns:a="http://schemas.openxmlformats.org/drawingml/2006/main">
               <a:ext uri="{FF2B5EF4-FFF2-40B4-BE49-F238E27FC236}">
-                <a16:creationId xmlns:a16="http://schemas.microsoft.com/office/drawing/2014/main" id="{624E356D-4CB8-4D38-932B-296349F7C166}"/>
+                <a16:creationId xmlns:a16="http://schemas.microsoft.com/office/drawing/2014/main" id="{6B3B6C56-EC6F-41F6-B60B-79F33F812D27}"/>
               </a:ext>
             </a:extLst>
           </p:cNvPr>
@@ -11199,7 +11207,7 @@
           <p:cNvPr id="6" name="">
             <a:extLst xmlns:a="http://schemas.openxmlformats.org/drawingml/2006/main">
               <a:ext uri="{FF2B5EF4-FFF2-40B4-BE49-F238E27FC236}">
-                <a16:creationId xmlns:a16="http://schemas.microsoft.com/office/drawing/2014/main" id="{5C895E10-E55C-48C8-AB80-EA8663BDEA87}"/>
+                <a16:creationId xmlns:a16="http://schemas.microsoft.com/office/drawing/2014/main" id="{C78DD8D2-87F0-4552-9585-D0424BF5573D}"/>
               </a:ext>
             </a:extLst>
           </p:cNvPr>
@@ -11256,7 +11264,7 @@
           <p:cNvPr id="7" name="">
             <a:extLst xmlns:a="http://schemas.openxmlformats.org/drawingml/2006/main">
               <a:ext uri="{FF2B5EF4-FFF2-40B4-BE49-F238E27FC236}">
-                <a16:creationId xmlns:a16="http://schemas.microsoft.com/office/drawing/2014/main" id="{D559EB53-61F4-450A-9430-66E99D8EFB7A}"/>
+                <a16:creationId xmlns:a16="http://schemas.microsoft.com/office/drawing/2014/main" id="{58686B0D-DCB6-4159-A80F-8AF45E4E9BFB}"/>
               </a:ext>
             </a:extLst>
           </p:cNvPr>
@@ -11288,7 +11296,7 @@
           <p:cNvPr id="8" name="">
             <a:extLst xmlns:a="http://schemas.openxmlformats.org/drawingml/2006/main">
               <a:ext uri="{FF2B5EF4-FFF2-40B4-BE49-F238E27FC236}">
-                <a16:creationId xmlns:a16="http://schemas.microsoft.com/office/drawing/2014/main" id="{CEBD9B13-D787-46FC-901E-E23A7EEFC09B}"/>
+                <a16:creationId xmlns:a16="http://schemas.microsoft.com/office/drawing/2014/main" id="{F41B65F5-FEE3-40B5-AE83-B3458AA76789}"/>
               </a:ext>
             </a:extLst>
           </p:cNvPr>
@@ -11345,7 +11353,7 @@
           <p:cNvPr id="9" name="">
             <a:extLst xmlns:a="http://schemas.openxmlformats.org/drawingml/2006/main">
               <a:ext uri="{FF2B5EF4-FFF2-40B4-BE49-F238E27FC236}">
-                <a16:creationId xmlns:a16="http://schemas.microsoft.com/office/drawing/2014/main" id="{342955AD-A624-48A1-B5B4-772C462554B3}"/>
+                <a16:creationId xmlns:a16="http://schemas.microsoft.com/office/drawing/2014/main" id="{1E513026-42E1-4E5C-914A-67EE01882F03}"/>
               </a:ext>
             </a:extLst>
           </p:cNvPr>
@@ -11406,7 +11414,7 @@
           <p:nvPr/>
         </p:nvPicPr>
         <p:blipFill>
-          <a:blip xmlns:r="http://schemas.openxmlformats.org/officeDocument/2006/relationships" xmlns:a="http://schemas.openxmlformats.org/drawingml/2006/main" r:embed="Rc4671e9126ca4876"/>
+          <a:blip xmlns:r="http://schemas.openxmlformats.org/officeDocument/2006/relationships" xmlns:a="http://schemas.openxmlformats.org/drawingml/2006/main" r:embed="R45d9b4312b074830"/>
           <a:stretch xmlns:a="http://schemas.openxmlformats.org/drawingml/2006/main"/>
         </p:blipFill>
         <p:spPr>
@@ -11424,7 +11432,7 @@
           <p:cNvPr id="11" name="">
             <a:extLst xmlns:a="http://schemas.openxmlformats.org/drawingml/2006/main">
               <a:ext uri="{FF2B5EF4-FFF2-40B4-BE49-F238E27FC236}">
-                <a16:creationId xmlns:a16="http://schemas.microsoft.com/office/drawing/2014/main" id="{01A03FF8-52EF-4363-A4C7-8F108BD63CC6}"/>
+                <a16:creationId xmlns:a16="http://schemas.microsoft.com/office/drawing/2014/main" id="{C6B0BF2A-FA98-40CE-BC79-87F3267DB4F3}"/>
               </a:ext>
             </a:extLst>
           </p:cNvPr>
@@ -11481,7 +11489,7 @@
           <p:cNvPr id="12" name="">
             <a:extLst xmlns:a="http://schemas.openxmlformats.org/drawingml/2006/main">
               <a:ext uri="{FF2B5EF4-FFF2-40B4-BE49-F238E27FC236}">
-                <a16:creationId xmlns:a16="http://schemas.microsoft.com/office/drawing/2014/main" id="{01A2E71C-6644-4C51-8E74-26F81E9B2680}"/>
+                <a16:creationId xmlns:a16="http://schemas.microsoft.com/office/drawing/2014/main" id="{613B4B37-009E-44F0-8807-3D7ACF9391DB}"/>
               </a:ext>
             </a:extLst>
           </p:cNvPr>
@@ -11538,7 +11546,7 @@
           <p:cNvPr id="13" name="">
             <a:extLst xmlns:a="http://schemas.openxmlformats.org/drawingml/2006/main">
               <a:ext uri="{FF2B5EF4-FFF2-40B4-BE49-F238E27FC236}">
-                <a16:creationId xmlns:a16="http://schemas.microsoft.com/office/drawing/2014/main" id="{90D3EA4F-D995-44D7-8853-DCE466D9DDD1}"/>
+                <a16:creationId xmlns:a16="http://schemas.microsoft.com/office/drawing/2014/main" id="{06211B31-5547-4B9E-BC4A-766BC90B01DC}"/>
               </a:ext>
             </a:extLst>
           </p:cNvPr>
@@ -11570,7 +11578,7 @@
           <p:cNvPr id="14" name="">
             <a:extLst xmlns:a="http://schemas.openxmlformats.org/drawingml/2006/main">
               <a:ext uri="{FF2B5EF4-FFF2-40B4-BE49-F238E27FC236}">
-                <a16:creationId xmlns:a16="http://schemas.microsoft.com/office/drawing/2014/main" id="{8C251721-B56E-49C1-B14B-395BB8625B6B}"/>
+                <a16:creationId xmlns:a16="http://schemas.microsoft.com/office/drawing/2014/main" id="{25FF1772-79B4-4EBA-86AD-0F6FECD78B07}"/>
               </a:ext>
             </a:extLst>
           </p:cNvPr>
@@ -11627,7 +11635,7 @@
           <p:cNvPr id="15" name="">
             <a:extLst xmlns:a="http://schemas.openxmlformats.org/drawingml/2006/main">
               <a:ext uri="{FF2B5EF4-FFF2-40B4-BE49-F238E27FC236}">
-                <a16:creationId xmlns:a16="http://schemas.microsoft.com/office/drawing/2014/main" id="{C0F44D37-C6EF-4FF6-A95F-B22814BB2D8C}"/>
+                <a16:creationId xmlns:a16="http://schemas.microsoft.com/office/drawing/2014/main" id="{A9E9EA42-4074-425D-B203-077230FB906D}"/>
               </a:ext>
             </a:extLst>
           </p:cNvPr>
@@ -11682,7 +11690,7 @@
     </p:spTree>
     <p:extLst>
       <p:ext uri="{BB962C8B-B14F-4D97-AF65-F5344CB8AC3E}">
-        <p14:creationId xmlns:p14="http://schemas.microsoft.com/office/powerpoint/2010/main" val="716774521"/>
+        <p14:creationId xmlns:p14="http://schemas.microsoft.com/office/powerpoint/2010/main" val="1722717938"/>
       </p:ext>
     </p:extLst>
   </p:cSld>
@@ -11837,7 +11845,7 @@
           <p:cNvPr id="23" name="">
             <a:extLst xmlns:a="http://schemas.openxmlformats.org/drawingml/2006/main">
               <a:ext uri="{FF2B5EF4-FFF2-40B4-BE49-F238E27FC236}">
-                <a16:creationId xmlns:a16="http://schemas.microsoft.com/office/drawing/2014/main" id="{CC130673-7876-4421-BD37-B407D8C9F5E3}"/>
+                <a16:creationId xmlns:a16="http://schemas.microsoft.com/office/drawing/2014/main" id="{61450414-0023-4C06-915A-0D2D2210EFB6}"/>
               </a:ext>
             </a:extLst>
           </p:cNvPr>
@@ -11869,7 +11877,7 @@
           <p:cNvPr id="2" name="">
             <a:extLst xmlns:a="http://schemas.openxmlformats.org/drawingml/2006/main">
               <a:ext uri="{FF2B5EF4-FFF2-40B4-BE49-F238E27FC236}">
-                <a16:creationId xmlns:a16="http://schemas.microsoft.com/office/drawing/2014/main" id="{1AF2B974-351D-4070-8C67-4A6A0F04726A}"/>
+                <a16:creationId xmlns:a16="http://schemas.microsoft.com/office/drawing/2014/main" id="{45269F72-4852-4A9B-AC10-70256ADB3251}"/>
               </a:ext>
             </a:extLst>
           </p:cNvPr>
@@ -11926,7 +11934,7 @@
           <p:cNvPr id="3" name="">
             <a:extLst xmlns:a="http://schemas.openxmlformats.org/drawingml/2006/main">
               <a:ext uri="{FF2B5EF4-FFF2-40B4-BE49-F238E27FC236}">
-                <a16:creationId xmlns:a16="http://schemas.microsoft.com/office/drawing/2014/main" id="{4589E96A-EC7A-43AF-982D-CC0942BC2E39}"/>
+                <a16:creationId xmlns:a16="http://schemas.microsoft.com/office/drawing/2014/main" id="{09083BE4-3CF4-4CCB-B25E-485714CFC672}"/>
               </a:ext>
             </a:extLst>
           </p:cNvPr>
@@ -11958,7 +11966,7 @@
           <p:cNvPr id="4" name="">
             <a:extLst xmlns:a="http://schemas.openxmlformats.org/drawingml/2006/main">
               <a:ext uri="{FF2B5EF4-FFF2-40B4-BE49-F238E27FC236}">
-                <a16:creationId xmlns:a16="http://schemas.microsoft.com/office/drawing/2014/main" id="{7645C40D-65A5-40E7-9552-5AA063E3066A}"/>
+                <a16:creationId xmlns:a16="http://schemas.microsoft.com/office/drawing/2014/main" id="{88C3E81E-EB9E-4236-931C-6452A188725A}"/>
               </a:ext>
             </a:extLst>
           </p:cNvPr>
@@ -12015,7 +12023,7 @@
           <p:cNvPr id="5" name="">
             <a:extLst xmlns:a="http://schemas.openxmlformats.org/drawingml/2006/main">
               <a:ext uri="{FF2B5EF4-FFF2-40B4-BE49-F238E27FC236}">
-                <a16:creationId xmlns:a16="http://schemas.microsoft.com/office/drawing/2014/main" id="{5D1A0EFA-B7AA-41CE-A87A-C1987E437749}"/>
+                <a16:creationId xmlns:a16="http://schemas.microsoft.com/office/drawing/2014/main" id="{D2C2B113-0BA6-4F98-B653-36289413B87F}"/>
               </a:ext>
             </a:extLst>
           </p:cNvPr>
@@ -12072,7 +12080,7 @@
           <p:cNvPr id="6" name="">
             <a:extLst xmlns:a="http://schemas.openxmlformats.org/drawingml/2006/main">
               <a:ext uri="{FF2B5EF4-FFF2-40B4-BE49-F238E27FC236}">
-                <a16:creationId xmlns:a16="http://schemas.microsoft.com/office/drawing/2014/main" id="{A4E86B7A-E538-4DC3-81BD-1C378AD749B6}"/>
+                <a16:creationId xmlns:a16="http://schemas.microsoft.com/office/drawing/2014/main" id="{1E89A3AC-E1D7-474D-BA24-FD1405BCBC76}"/>
               </a:ext>
             </a:extLst>
           </p:cNvPr>
@@ -12129,7 +12137,7 @@
           <p:cNvPr id="7" name="">
             <a:extLst xmlns:a="http://schemas.openxmlformats.org/drawingml/2006/main">
               <a:ext uri="{FF2B5EF4-FFF2-40B4-BE49-F238E27FC236}">
-                <a16:creationId xmlns:a16="http://schemas.microsoft.com/office/drawing/2014/main" id="{F2D9A2BA-BB2F-4568-BED6-AC7A7F238E42}"/>
+                <a16:creationId xmlns:a16="http://schemas.microsoft.com/office/drawing/2014/main" id="{F84789D8-00D2-4329-AF7B-5EB8EAC591A5}"/>
               </a:ext>
             </a:extLst>
           </p:cNvPr>
@@ -12161,7 +12169,7 @@
           <p:cNvPr id="8" name="">
             <a:extLst xmlns:a="http://schemas.openxmlformats.org/drawingml/2006/main">
               <a:ext uri="{FF2B5EF4-FFF2-40B4-BE49-F238E27FC236}">
-                <a16:creationId xmlns:a16="http://schemas.microsoft.com/office/drawing/2014/main" id="{33F9FB79-2544-454A-AD3B-C4E93DEAD6D5}"/>
+                <a16:creationId xmlns:a16="http://schemas.microsoft.com/office/drawing/2014/main" id="{A2F2A172-7957-45E1-8F1F-05FDF9E1F7BB}"/>
               </a:ext>
             </a:extLst>
           </p:cNvPr>
@@ -12218,7 +12226,7 @@
           <p:cNvPr id="9" name="">
             <a:extLst xmlns:a="http://schemas.openxmlformats.org/drawingml/2006/main">
               <a:ext uri="{FF2B5EF4-FFF2-40B4-BE49-F238E27FC236}">
-                <a16:creationId xmlns:a16="http://schemas.microsoft.com/office/drawing/2014/main" id="{41A9284C-FCE9-471D-8270-1806A3A061BF}"/>
+                <a16:creationId xmlns:a16="http://schemas.microsoft.com/office/drawing/2014/main" id="{F8A786BB-920E-4C97-AA13-C3DF23A601DF}"/>
               </a:ext>
             </a:extLst>
           </p:cNvPr>
@@ -12275,7 +12283,7 @@
           <p:cNvPr id="10" name="">
             <a:extLst xmlns:a="http://schemas.openxmlformats.org/drawingml/2006/main">
               <a:ext uri="{FF2B5EF4-FFF2-40B4-BE49-F238E27FC236}">
-                <a16:creationId xmlns:a16="http://schemas.microsoft.com/office/drawing/2014/main" id="{BE674A8F-0C40-4BDB-8D5D-2FD82EEF722A}"/>
+                <a16:creationId xmlns:a16="http://schemas.microsoft.com/office/drawing/2014/main" id="{1FF7CC0F-7C68-417C-AAD5-D2D1964B0AD0}"/>
               </a:ext>
             </a:extLst>
           </p:cNvPr>
@@ -12309,7 +12317,7 @@
           <p:cNvPr id="11" name="">
             <a:extLst xmlns:a="http://schemas.openxmlformats.org/drawingml/2006/main">
               <a:ext uri="{FF2B5EF4-FFF2-40B4-BE49-F238E27FC236}">
-                <a16:creationId xmlns:a16="http://schemas.microsoft.com/office/drawing/2014/main" id="{1226DA49-E5CF-4169-8669-666915A16BC2}"/>
+                <a16:creationId xmlns:a16="http://schemas.microsoft.com/office/drawing/2014/main" id="{C6BBBA36-352D-4BA7-8606-8B2E606584BC}"/>
               </a:ext>
             </a:extLst>
           </p:cNvPr>
@@ -12341,7 +12349,7 @@
           <p:cNvPr id="12" name="">
             <a:extLst xmlns:a="http://schemas.openxmlformats.org/drawingml/2006/main">
               <a:ext uri="{FF2B5EF4-FFF2-40B4-BE49-F238E27FC236}">
-                <a16:creationId xmlns:a16="http://schemas.microsoft.com/office/drawing/2014/main" id="{8BE163D7-B316-4079-AF3C-5135EC52FB32}"/>
+                <a16:creationId xmlns:a16="http://schemas.microsoft.com/office/drawing/2014/main" id="{DB1504D3-2AA9-4496-BE33-DFF99F5123FA}"/>
               </a:ext>
             </a:extLst>
           </p:cNvPr>
@@ -12398,7 +12406,7 @@
           <p:cNvPr id="13" name="">
             <a:extLst xmlns:a="http://schemas.openxmlformats.org/drawingml/2006/main">
               <a:ext uri="{FF2B5EF4-FFF2-40B4-BE49-F238E27FC236}">
-                <a16:creationId xmlns:a16="http://schemas.microsoft.com/office/drawing/2014/main" id="{3666F0F7-C7D4-430D-B7C9-86BDB294DFD0}"/>
+                <a16:creationId xmlns:a16="http://schemas.microsoft.com/office/drawing/2014/main" id="{6F6D1D91-73B0-4A68-83C5-991F0543CCED}"/>
               </a:ext>
             </a:extLst>
           </p:cNvPr>
@@ -12455,7 +12463,7 @@
           <p:cNvPr id="14" name="">
             <a:extLst xmlns:a="http://schemas.openxmlformats.org/drawingml/2006/main">
               <a:ext uri="{FF2B5EF4-FFF2-40B4-BE49-F238E27FC236}">
-                <a16:creationId xmlns:a16="http://schemas.microsoft.com/office/drawing/2014/main" id="{C279D16F-F2DB-4D86-AAF9-0EF2CD905193}"/>
+                <a16:creationId xmlns:a16="http://schemas.microsoft.com/office/drawing/2014/main" id="{E9411822-9F2A-446D-8B94-B96D042402CD}"/>
               </a:ext>
             </a:extLst>
           </p:cNvPr>
@@ -12489,7 +12497,7 @@
           <p:cNvPr id="15" name="">
             <a:extLst xmlns:a="http://schemas.openxmlformats.org/drawingml/2006/main">
               <a:ext uri="{FF2B5EF4-FFF2-40B4-BE49-F238E27FC236}">
-                <a16:creationId xmlns:a16="http://schemas.microsoft.com/office/drawing/2014/main" id="{BE96CBC0-DC8E-42C4-8BC5-BF5755E6D1F3}"/>
+                <a16:creationId xmlns:a16="http://schemas.microsoft.com/office/drawing/2014/main" id="{70581748-EBF3-488B-B3E1-9C0704D112FF}"/>
               </a:ext>
             </a:extLst>
           </p:cNvPr>
@@ -12521,7 +12529,7 @@
           <p:cNvPr id="16" name="">
             <a:extLst xmlns:a="http://schemas.openxmlformats.org/drawingml/2006/main">
               <a:ext uri="{FF2B5EF4-FFF2-40B4-BE49-F238E27FC236}">
-                <a16:creationId xmlns:a16="http://schemas.microsoft.com/office/drawing/2014/main" id="{350ADBBD-5492-47AF-AE95-8933997A5AD0}"/>
+                <a16:creationId xmlns:a16="http://schemas.microsoft.com/office/drawing/2014/main" id="{2E35964F-9591-4ADA-A02C-238A21BE98D7}"/>
               </a:ext>
             </a:extLst>
           </p:cNvPr>
@@ -12578,7 +12586,7 @@
           <p:cNvPr id="17" name="">
             <a:extLst xmlns:a="http://schemas.openxmlformats.org/drawingml/2006/main">
               <a:ext uri="{FF2B5EF4-FFF2-40B4-BE49-F238E27FC236}">
-                <a16:creationId xmlns:a16="http://schemas.microsoft.com/office/drawing/2014/main" id="{9680FB11-C918-4C3A-ACAA-B972C4C5DD6D}"/>
+                <a16:creationId xmlns:a16="http://schemas.microsoft.com/office/drawing/2014/main" id="{4B8BA65E-88FC-4EB3-B48A-2CF51F5E29E1}"/>
               </a:ext>
             </a:extLst>
           </p:cNvPr>
@@ -12635,7 +12643,7 @@
           <p:cNvPr id="18" name="">
             <a:extLst xmlns:a="http://schemas.openxmlformats.org/drawingml/2006/main">
               <a:ext uri="{FF2B5EF4-FFF2-40B4-BE49-F238E27FC236}">
-                <a16:creationId xmlns:a16="http://schemas.microsoft.com/office/drawing/2014/main" id="{B8E19BD6-DBF3-4F52-A34D-D512AC11D8E5}"/>
+                <a16:creationId xmlns:a16="http://schemas.microsoft.com/office/drawing/2014/main" id="{59C3AC72-3F3B-4FEA-96FC-499E410C10E4}"/>
               </a:ext>
             </a:extLst>
           </p:cNvPr>
@@ -12669,7 +12677,7 @@
           <p:cNvPr id="19" name="">
             <a:extLst xmlns:a="http://schemas.openxmlformats.org/drawingml/2006/main">
               <a:ext uri="{FF2B5EF4-FFF2-40B4-BE49-F238E27FC236}">
-                <a16:creationId xmlns:a16="http://schemas.microsoft.com/office/drawing/2014/main" id="{6E4F811C-9B87-40E7-A237-73169665D38D}"/>
+                <a16:creationId xmlns:a16="http://schemas.microsoft.com/office/drawing/2014/main" id="{B39993BA-A16D-4978-8D08-1570C1D52D64}"/>
               </a:ext>
             </a:extLst>
           </p:cNvPr>
@@ -12701,7 +12709,7 @@
           <p:cNvPr id="20" name="">
             <a:extLst xmlns:a="http://schemas.openxmlformats.org/drawingml/2006/main">
               <a:ext uri="{FF2B5EF4-FFF2-40B4-BE49-F238E27FC236}">
-                <a16:creationId xmlns:a16="http://schemas.microsoft.com/office/drawing/2014/main" id="{85CF8279-725E-4717-9F64-3AF216FBBB68}"/>
+                <a16:creationId xmlns:a16="http://schemas.microsoft.com/office/drawing/2014/main" id="{9DF7BADD-C0B9-430F-B65B-83B8C1690929}"/>
               </a:ext>
             </a:extLst>
           </p:cNvPr>
@@ -12758,7 +12766,7 @@
           <p:cNvPr id="21" name="">
             <a:extLst xmlns:a="http://schemas.openxmlformats.org/drawingml/2006/main">
               <a:ext uri="{FF2B5EF4-FFF2-40B4-BE49-F238E27FC236}">
-                <a16:creationId xmlns:a16="http://schemas.microsoft.com/office/drawing/2014/main" id="{1DEA42BA-317E-4D86-B42E-A4B3A181F290}"/>
+                <a16:creationId xmlns:a16="http://schemas.microsoft.com/office/drawing/2014/main" id="{CB645D37-F26B-4D82-9734-B1249C4DF4EB}"/>
               </a:ext>
             </a:extLst>
           </p:cNvPr>
@@ -12815,7 +12823,7 @@
           <p:cNvPr id="22" name="">
             <a:extLst xmlns:a="http://schemas.openxmlformats.org/drawingml/2006/main">
               <a:ext uri="{FF2B5EF4-FFF2-40B4-BE49-F238E27FC236}">
-                <a16:creationId xmlns:a16="http://schemas.microsoft.com/office/drawing/2014/main" id="{03A66086-9654-428E-82D2-A9A4843C995A}"/>
+                <a16:creationId xmlns:a16="http://schemas.microsoft.com/office/drawing/2014/main" id="{35F92530-D69A-47D4-90C0-ED01F104D195}"/>
               </a:ext>
             </a:extLst>
           </p:cNvPr>
@@ -12870,7 +12878,7 @@
     </p:spTree>
     <p:extLst>
       <p:ext uri="{BB962C8B-B14F-4D97-AF65-F5344CB8AC3E}">
-        <p14:creationId xmlns:p14="http://schemas.microsoft.com/office/powerpoint/2010/main" val="1556071167"/>
+        <p14:creationId xmlns:p14="http://schemas.microsoft.com/office/powerpoint/2010/main" val="1036996400"/>
       </p:ext>
     </p:extLst>
   </p:cSld>
@@ -13071,7 +13079,7 @@
           <p:cNvPr id="22" name="">
             <a:extLst xmlns:a="http://schemas.openxmlformats.org/drawingml/2006/main">
               <a:ext uri="{FF2B5EF4-FFF2-40B4-BE49-F238E27FC236}">
-                <a16:creationId xmlns:a16="http://schemas.microsoft.com/office/drawing/2014/main" id="{8BD24B0E-DE71-4F4D-AC4C-2FBF76A8491D}"/>
+                <a16:creationId xmlns:a16="http://schemas.microsoft.com/office/drawing/2014/main" id="{6C64C493-198D-461A-8343-0DE05D28E0CD}"/>
               </a:ext>
             </a:extLst>
           </p:cNvPr>
@@ -13103,7 +13111,7 @@
           <p:cNvPr id="2" name="">
             <a:extLst xmlns:a="http://schemas.openxmlformats.org/drawingml/2006/main">
               <a:ext uri="{FF2B5EF4-FFF2-40B4-BE49-F238E27FC236}">
-                <a16:creationId xmlns:a16="http://schemas.microsoft.com/office/drawing/2014/main" id="{0F926334-3A5C-4DBC-8B6C-E8DD6F4C387D}"/>
+                <a16:creationId xmlns:a16="http://schemas.microsoft.com/office/drawing/2014/main" id="{F960F933-03D0-4AF2-A0D6-0C95773C4462}"/>
               </a:ext>
             </a:extLst>
           </p:cNvPr>
@@ -13160,7 +13168,7 @@
           <p:cNvPr id="3" name="">
             <a:extLst xmlns:a="http://schemas.openxmlformats.org/drawingml/2006/main">
               <a:ext uri="{FF2B5EF4-FFF2-40B4-BE49-F238E27FC236}">
-                <a16:creationId xmlns:a16="http://schemas.microsoft.com/office/drawing/2014/main" id="{43804A1F-150F-4959-A802-E023D20EFEAF}"/>
+                <a16:creationId xmlns:a16="http://schemas.microsoft.com/office/drawing/2014/main" id="{C7681355-742D-4F97-B2AE-1FDFACB83A12}"/>
               </a:ext>
             </a:extLst>
           </p:cNvPr>
@@ -13192,7 +13200,7 @@
           <p:cNvPr id="4" name="">
             <a:extLst xmlns:a="http://schemas.openxmlformats.org/drawingml/2006/main">
               <a:ext uri="{FF2B5EF4-FFF2-40B4-BE49-F238E27FC236}">
-                <a16:creationId xmlns:a16="http://schemas.microsoft.com/office/drawing/2014/main" id="{ACAA8852-FDDC-4E3A-8A1A-1E0F208029E8}"/>
+                <a16:creationId xmlns:a16="http://schemas.microsoft.com/office/drawing/2014/main" id="{CF0AC01F-8DD9-4183-80ED-5AA8B62F500E}"/>
               </a:ext>
             </a:extLst>
           </p:cNvPr>
@@ -13249,7 +13257,7 @@
           <p:cNvPr id="5" name="">
             <a:extLst xmlns:a="http://schemas.openxmlformats.org/drawingml/2006/main">
               <a:ext uri="{FF2B5EF4-FFF2-40B4-BE49-F238E27FC236}">
-                <a16:creationId xmlns:a16="http://schemas.microsoft.com/office/drawing/2014/main" id="{4E33E430-8AA2-4C26-90F2-BD74398E4DE5}"/>
+                <a16:creationId xmlns:a16="http://schemas.microsoft.com/office/drawing/2014/main" id="{20381A23-6283-4D99-9517-8B057C663D96}"/>
               </a:ext>
             </a:extLst>
           </p:cNvPr>
@@ -13306,7 +13314,7 @@
           <p:cNvPr id="6" name="">
             <a:extLst xmlns:a="http://schemas.openxmlformats.org/drawingml/2006/main">
               <a:ext uri="{FF2B5EF4-FFF2-40B4-BE49-F238E27FC236}">
-                <a16:creationId xmlns:a16="http://schemas.microsoft.com/office/drawing/2014/main" id="{61F2430A-EB34-4F2E-96FC-21D69B6F2B18}"/>
+                <a16:creationId xmlns:a16="http://schemas.microsoft.com/office/drawing/2014/main" id="{568BFE84-A0C6-4443-8B57-9E27D2E03174}"/>
               </a:ext>
             </a:extLst>
           </p:cNvPr>
@@ -13363,7 +13371,7 @@
           <p:cNvPr id="7" name="">
             <a:extLst xmlns:a="http://schemas.openxmlformats.org/drawingml/2006/main">
               <a:ext uri="{FF2B5EF4-FFF2-40B4-BE49-F238E27FC236}">
-                <a16:creationId xmlns:a16="http://schemas.microsoft.com/office/drawing/2014/main" id="{DA00A828-5ADF-4ED3-A448-70934F40C1FD}"/>
+                <a16:creationId xmlns:a16="http://schemas.microsoft.com/office/drawing/2014/main" id="{EB7DE2D9-FE1E-4D41-8999-838C2E4240D0}"/>
               </a:ext>
             </a:extLst>
           </p:cNvPr>
@@ -13395,7 +13403,7 @@
           <p:cNvPr id="8" name="">
             <a:extLst xmlns:a="http://schemas.openxmlformats.org/drawingml/2006/main">
               <a:ext uri="{FF2B5EF4-FFF2-40B4-BE49-F238E27FC236}">
-                <a16:creationId xmlns:a16="http://schemas.microsoft.com/office/drawing/2014/main" id="{C39A2EC4-821E-4012-9D84-5210B33110AE}"/>
+                <a16:creationId xmlns:a16="http://schemas.microsoft.com/office/drawing/2014/main" id="{F946F7E1-5A08-40E9-B376-DC4A38FC14FF}"/>
               </a:ext>
             </a:extLst>
           </p:cNvPr>
@@ -13452,7 +13460,7 @@
           <p:cNvPr id="9" name="">
             <a:extLst xmlns:a="http://schemas.openxmlformats.org/drawingml/2006/main">
               <a:ext uri="{FF2B5EF4-FFF2-40B4-BE49-F238E27FC236}">
-                <a16:creationId xmlns:a16="http://schemas.microsoft.com/office/drawing/2014/main" id="{4A845DFF-F8D1-4665-9FEF-F8ACC4A27FE9}"/>
+                <a16:creationId xmlns:a16="http://schemas.microsoft.com/office/drawing/2014/main" id="{471EF47E-DA92-48C7-85B9-A805CC8854CA}"/>
               </a:ext>
             </a:extLst>
           </p:cNvPr>
@@ -13509,7 +13517,7 @@
           <p:cNvPr id="10" name="">
             <a:extLst xmlns:a="http://schemas.openxmlformats.org/drawingml/2006/main">
               <a:ext uri="{FF2B5EF4-FFF2-40B4-BE49-F238E27FC236}">
-                <a16:creationId xmlns:a16="http://schemas.microsoft.com/office/drawing/2014/main" id="{83CB74DA-9E57-45E6-B3B2-19D02900B297}"/>
+                <a16:creationId xmlns:a16="http://schemas.microsoft.com/office/drawing/2014/main" id="{2698B714-60E8-49E6-92BB-A4CC2AA38F66}"/>
               </a:ext>
             </a:extLst>
           </p:cNvPr>
@@ -13543,7 +13551,7 @@
           <p:cNvPr id="11" name="">
             <a:extLst xmlns:a="http://schemas.openxmlformats.org/drawingml/2006/main">
               <a:ext uri="{FF2B5EF4-FFF2-40B4-BE49-F238E27FC236}">
-                <a16:creationId xmlns:a16="http://schemas.microsoft.com/office/drawing/2014/main" id="{EB0C050F-F6CD-4730-A6BA-4D5F7E49324E}"/>
+                <a16:creationId xmlns:a16="http://schemas.microsoft.com/office/drawing/2014/main" id="{222D3DF0-3969-4368-B0FD-66E3B6C2F71F}"/>
               </a:ext>
             </a:extLst>
           </p:cNvPr>
@@ -13575,7 +13583,7 @@
           <p:cNvPr id="12" name="">
             <a:extLst xmlns:a="http://schemas.openxmlformats.org/drawingml/2006/main">
               <a:ext uri="{FF2B5EF4-FFF2-40B4-BE49-F238E27FC236}">
-                <a16:creationId xmlns:a16="http://schemas.microsoft.com/office/drawing/2014/main" id="{D464897F-92A9-46C7-BD24-BC2A3ABB1C81}"/>
+                <a16:creationId xmlns:a16="http://schemas.microsoft.com/office/drawing/2014/main" id="{5DA48B0D-5278-4EF6-9328-1E40A690C00B}"/>
               </a:ext>
             </a:extLst>
           </p:cNvPr>
@@ -13632,7 +13640,7 @@
           <p:cNvPr id="13" name="">
             <a:extLst xmlns:a="http://schemas.openxmlformats.org/drawingml/2006/main">
               <a:ext uri="{FF2B5EF4-FFF2-40B4-BE49-F238E27FC236}">
-                <a16:creationId xmlns:a16="http://schemas.microsoft.com/office/drawing/2014/main" id="{4C1A7A69-6256-4FDF-96F8-5D2B43061BF6}"/>
+                <a16:creationId xmlns:a16="http://schemas.microsoft.com/office/drawing/2014/main" id="{A9056660-8519-4686-B68E-D15F7FC497F5}"/>
               </a:ext>
             </a:extLst>
           </p:cNvPr>
@@ -13689,7 +13697,7 @@
           <p:cNvPr id="14" name="">
             <a:extLst xmlns:a="http://schemas.openxmlformats.org/drawingml/2006/main">
               <a:ext uri="{FF2B5EF4-FFF2-40B4-BE49-F238E27FC236}">
-                <a16:creationId xmlns:a16="http://schemas.microsoft.com/office/drawing/2014/main" id="{877B7A54-F492-4C4B-9023-0DA2D5574A35}"/>
+                <a16:creationId xmlns:a16="http://schemas.microsoft.com/office/drawing/2014/main" id="{B60F9B9C-62CE-4257-B1D6-410D6E2218AE}"/>
               </a:ext>
             </a:extLst>
           </p:cNvPr>
@@ -13723,7 +13731,7 @@
           <p:cNvPr id="15" name="">
             <a:extLst xmlns:a="http://schemas.openxmlformats.org/drawingml/2006/main">
               <a:ext uri="{FF2B5EF4-FFF2-40B4-BE49-F238E27FC236}">
-                <a16:creationId xmlns:a16="http://schemas.microsoft.com/office/drawing/2014/main" id="{4D91F384-08DB-48ED-8E08-725EE5BA6AD6}"/>
+                <a16:creationId xmlns:a16="http://schemas.microsoft.com/office/drawing/2014/main" id="{0D4879D0-254E-4B59-B9EF-E4F9657E312A}"/>
               </a:ext>
             </a:extLst>
           </p:cNvPr>
@@ -13755,7 +13763,7 @@
           <p:cNvPr id="16" name="">
             <a:extLst xmlns:a="http://schemas.openxmlformats.org/drawingml/2006/main">
               <a:ext uri="{FF2B5EF4-FFF2-40B4-BE49-F238E27FC236}">
-                <a16:creationId xmlns:a16="http://schemas.microsoft.com/office/drawing/2014/main" id="{29D4C335-9896-41BC-909D-2BE72A574767}"/>
+                <a16:creationId xmlns:a16="http://schemas.microsoft.com/office/drawing/2014/main" id="{AAD233C1-0C9E-4A82-BCE0-F1361379D54D}"/>
               </a:ext>
             </a:extLst>
           </p:cNvPr>
@@ -13812,7 +13820,7 @@
           <p:cNvPr id="17" name="">
             <a:extLst xmlns:a="http://schemas.openxmlformats.org/drawingml/2006/main">
               <a:ext uri="{FF2B5EF4-FFF2-40B4-BE49-F238E27FC236}">
-                <a16:creationId xmlns:a16="http://schemas.microsoft.com/office/drawing/2014/main" id="{C4BA0DF0-A235-4166-9E01-6FB6B837699B}"/>
+                <a16:creationId xmlns:a16="http://schemas.microsoft.com/office/drawing/2014/main" id="{072E52CD-91F1-41A0-BD9A-88FEF5E1B302}"/>
               </a:ext>
             </a:extLst>
           </p:cNvPr>
@@ -13869,7 +13877,7 @@
           <p:cNvPr id="18" name="">
             <a:extLst xmlns:a="http://schemas.openxmlformats.org/drawingml/2006/main">
               <a:ext uri="{FF2B5EF4-FFF2-40B4-BE49-F238E27FC236}">
-                <a16:creationId xmlns:a16="http://schemas.microsoft.com/office/drawing/2014/main" id="{099F0114-1580-4E40-9193-1A567AE24848}"/>
+                <a16:creationId xmlns:a16="http://schemas.microsoft.com/office/drawing/2014/main" id="{3E981894-C920-42DE-92F3-8C6F34ADBD21}"/>
               </a:ext>
             </a:extLst>
           </p:cNvPr>
@@ -13903,7 +13911,7 @@
           <p:cNvPr id="19" name="">
             <a:extLst xmlns:a="http://schemas.openxmlformats.org/drawingml/2006/main">
               <a:ext uri="{FF2B5EF4-FFF2-40B4-BE49-F238E27FC236}">
-                <a16:creationId xmlns:a16="http://schemas.microsoft.com/office/drawing/2014/main" id="{16F4B607-CEED-4F96-A44C-91F4E8C74A2E}"/>
+                <a16:creationId xmlns:a16="http://schemas.microsoft.com/office/drawing/2014/main" id="{500EAF55-29EC-4657-823A-801CB2D73D99}"/>
               </a:ext>
             </a:extLst>
           </p:cNvPr>
@@ -13935,7 +13943,7 @@
           <p:cNvPr id="20" name="">
             <a:extLst xmlns:a="http://schemas.openxmlformats.org/drawingml/2006/main">
               <a:ext uri="{FF2B5EF4-FFF2-40B4-BE49-F238E27FC236}">
-                <a16:creationId xmlns:a16="http://schemas.microsoft.com/office/drawing/2014/main" id="{CBF433C6-1B0D-4141-BF88-A20A07C46B42}"/>
+                <a16:creationId xmlns:a16="http://schemas.microsoft.com/office/drawing/2014/main" id="{1FF46AD7-F820-4E3D-8274-224A291CD265}"/>
               </a:ext>
             </a:extLst>
           </p:cNvPr>
@@ -13992,7 +14000,7 @@
           <p:cNvPr id="21" name="">
             <a:extLst xmlns:a="http://schemas.openxmlformats.org/drawingml/2006/main">
               <a:ext uri="{FF2B5EF4-FFF2-40B4-BE49-F238E27FC236}">
-                <a16:creationId xmlns:a16="http://schemas.microsoft.com/office/drawing/2014/main" id="{27ED0BF1-309E-4FCE-AF90-853777BFFFB2}"/>
+                <a16:creationId xmlns:a16="http://schemas.microsoft.com/office/drawing/2014/main" id="{444962A6-3CD5-413B-93CC-1BA11D4CAEFB}"/>
               </a:ext>
             </a:extLst>
           </p:cNvPr>
@@ -14047,7 +14055,7 @@
     </p:spTree>
     <p:extLst>
       <p:ext uri="{BB962C8B-B14F-4D97-AF65-F5344CB8AC3E}">
-        <p14:creationId xmlns:p14="http://schemas.microsoft.com/office/powerpoint/2010/main" val="587795881"/>
+        <p14:creationId xmlns:p14="http://schemas.microsoft.com/office/powerpoint/2010/main" val="2069839679"/>
       </p:ext>
     </p:extLst>
   </p:cSld>
